--- a/Sales Analysis Dashboard/Presentation.pptx
+++ b/Sales Analysis Dashboard/Presentation.pptx
@@ -2,21 +2,22 @@
 <file path=ppt/presentation.xml><?xml version="1.0" encoding="utf-8"?>
 <p:presentation xmlns:a="http://schemas.openxmlformats.org/drawingml/2006/main" xmlns:r="http://schemas.openxmlformats.org/officeDocument/2006/relationships" xmlns:p="http://schemas.openxmlformats.org/presentationml/2006/main" saveSubsetFonts="1">
   <p:sldMasterIdLst>
-    <p:sldMasterId id="2147483648" r:id="rId1"/>
+    <p:sldMasterId id="2147483684" r:id="rId1"/>
   </p:sldMasterIdLst>
   <p:sldIdLst>
     <p:sldId id="257" r:id="rId2"/>
     <p:sldId id="258" r:id="rId3"/>
     <p:sldId id="259" r:id="rId4"/>
     <p:sldId id="260" r:id="rId5"/>
+    <p:sldId id="262" r:id="rId6"/>
   </p:sldIdLst>
-  <p:sldSz cx="12192000" cy="6858000"/>
-  <p:notesSz cx="6858000" cy="9144000"/>
+  <p:sldSz cx="20116800" cy="10972800"/>
+  <p:notesSz cx="9144000" cy="6858000"/>
   <p:defaultTextStyle>
     <a:defPPr>
-      <a:defRPr lang="ar-EG"/>
+      <a:defRPr lang="en-US"/>
     </a:defPPr>
-    <a:lvl1pPr marL="0" algn="l" defTabSz="914400" rtl="0" eaLnBrk="1" latinLnBrk="0" hangingPunct="1">
+    <a:lvl1pPr marL="0" algn="l" defTabSz="457200" rtl="0" eaLnBrk="1" latinLnBrk="0" hangingPunct="1">
       <a:defRPr sz="1800" kern="1200">
         <a:solidFill>
           <a:schemeClr val="tx1"/>
@@ -26,7 +27,7 @@
         <a:cs typeface="+mn-cs"/>
       </a:defRPr>
     </a:lvl1pPr>
-    <a:lvl2pPr marL="457200" algn="l" defTabSz="914400" rtl="0" eaLnBrk="1" latinLnBrk="0" hangingPunct="1">
+    <a:lvl2pPr marL="457200" algn="l" defTabSz="457200" rtl="0" eaLnBrk="1" latinLnBrk="0" hangingPunct="1">
       <a:defRPr sz="1800" kern="1200">
         <a:solidFill>
           <a:schemeClr val="tx1"/>
@@ -36,7 +37,7 @@
         <a:cs typeface="+mn-cs"/>
       </a:defRPr>
     </a:lvl2pPr>
-    <a:lvl3pPr marL="914400" algn="l" defTabSz="914400" rtl="0" eaLnBrk="1" latinLnBrk="0" hangingPunct="1">
+    <a:lvl3pPr marL="914400" algn="l" defTabSz="457200" rtl="0" eaLnBrk="1" latinLnBrk="0" hangingPunct="1">
       <a:defRPr sz="1800" kern="1200">
         <a:solidFill>
           <a:schemeClr val="tx1"/>
@@ -46,7 +47,7 @@
         <a:cs typeface="+mn-cs"/>
       </a:defRPr>
     </a:lvl3pPr>
-    <a:lvl4pPr marL="1371600" algn="l" defTabSz="914400" rtl="0" eaLnBrk="1" latinLnBrk="0" hangingPunct="1">
+    <a:lvl4pPr marL="1371600" algn="l" defTabSz="457200" rtl="0" eaLnBrk="1" latinLnBrk="0" hangingPunct="1">
       <a:defRPr sz="1800" kern="1200">
         <a:solidFill>
           <a:schemeClr val="tx1"/>
@@ -56,7 +57,7 @@
         <a:cs typeface="+mn-cs"/>
       </a:defRPr>
     </a:lvl4pPr>
-    <a:lvl5pPr marL="1828800" algn="l" defTabSz="914400" rtl="0" eaLnBrk="1" latinLnBrk="0" hangingPunct="1">
+    <a:lvl5pPr marL="1828800" algn="l" defTabSz="457200" rtl="0" eaLnBrk="1" latinLnBrk="0" hangingPunct="1">
       <a:defRPr sz="1800" kern="1200">
         <a:solidFill>
           <a:schemeClr val="tx1"/>
@@ -66,7 +67,7 @@
         <a:cs typeface="+mn-cs"/>
       </a:defRPr>
     </a:lvl5pPr>
-    <a:lvl6pPr marL="2286000" algn="l" defTabSz="914400" rtl="0" eaLnBrk="1" latinLnBrk="0" hangingPunct="1">
+    <a:lvl6pPr marL="2286000" algn="l" defTabSz="457200" rtl="0" eaLnBrk="1" latinLnBrk="0" hangingPunct="1">
       <a:defRPr sz="1800" kern="1200">
         <a:solidFill>
           <a:schemeClr val="tx1"/>
@@ -76,7 +77,7 @@
         <a:cs typeface="+mn-cs"/>
       </a:defRPr>
     </a:lvl6pPr>
-    <a:lvl7pPr marL="2743200" algn="l" defTabSz="914400" rtl="0" eaLnBrk="1" latinLnBrk="0" hangingPunct="1">
+    <a:lvl7pPr marL="2743200" algn="l" defTabSz="457200" rtl="0" eaLnBrk="1" latinLnBrk="0" hangingPunct="1">
       <a:defRPr sz="1800" kern="1200">
         <a:solidFill>
           <a:schemeClr val="tx1"/>
@@ -86,7 +87,7 @@
         <a:cs typeface="+mn-cs"/>
       </a:defRPr>
     </a:lvl7pPr>
-    <a:lvl8pPr marL="3200400" algn="l" defTabSz="914400" rtl="0" eaLnBrk="1" latinLnBrk="0" hangingPunct="1">
+    <a:lvl8pPr marL="3200400" algn="l" defTabSz="457200" rtl="0" eaLnBrk="1" latinLnBrk="0" hangingPunct="1">
       <a:defRPr sz="1800" kern="1200">
         <a:solidFill>
           <a:schemeClr val="tx1"/>
@@ -96,7 +97,7 @@
         <a:cs typeface="+mn-cs"/>
       </a:defRPr>
     </a:lvl8pPr>
-    <a:lvl9pPr marL="3657600" algn="l" defTabSz="914400" rtl="0" eaLnBrk="1" latinLnBrk="0" hangingPunct="1">
+    <a:lvl9pPr marL="3657600" algn="l" defTabSz="457200" rtl="0" eaLnBrk="1" latinLnBrk="0" hangingPunct="1">
       <a:defRPr sz="1800" kern="1200">
         <a:solidFill>
           <a:schemeClr val="tx1"/>
@@ -134,13 +135,7 @@
       </p:grpSpPr>
       <p:sp>
         <p:nvSpPr>
-          <p:cNvPr id="2" name="Title 1">
-            <a:extLst>
-              <a:ext uri="{FF2B5EF4-FFF2-40B4-BE49-F238E27FC236}">
-                <a16:creationId xmlns:a16="http://schemas.microsoft.com/office/drawing/2014/main" id="{2152FBA2-2F1D-48B0-AC39-A3906B7AAB7E}"/>
-              </a:ext>
-            </a:extLst>
-          </p:cNvPr>
+          <p:cNvPr id="2" name="Title 1"/>
           <p:cNvSpPr>
             <a:spLocks noGrp="1"/>
           </p:cNvSpPr>
@@ -150,15 +145,15 @@
         </p:nvSpPr>
         <p:spPr>
           <a:xfrm>
-            <a:off x="1524000" y="1122363"/>
-            <a:ext cx="9144000" cy="2387600"/>
+            <a:off x="2514600" y="1795781"/>
+            <a:ext cx="15087600" cy="3820160"/>
           </a:xfrm>
         </p:spPr>
         <p:txBody>
           <a:bodyPr anchor="b"/>
           <a:lstStyle>
             <a:lvl1pPr algn="ctr">
-              <a:defRPr sz="6000"/>
+              <a:defRPr sz="9600"/>
             </a:lvl1pPr>
           </a:lstStyle>
           <a:p>
@@ -166,19 +161,13 @@
               <a:rPr lang="en-US"/>
               <a:t>Click to edit Master title style</a:t>
             </a:r>
-            <a:endParaRPr lang="ar-EG"/>
-          </a:p>
-        </p:txBody>
-      </p:sp>
-      <p:sp>
-        <p:nvSpPr>
-          <p:cNvPr id="3" name="Subtitle 2">
-            <a:extLst>
-              <a:ext uri="{FF2B5EF4-FFF2-40B4-BE49-F238E27FC236}">
-                <a16:creationId xmlns:a16="http://schemas.microsoft.com/office/drawing/2014/main" id="{4E42001E-AB84-4D03-978A-0AC35BC555C7}"/>
-              </a:ext>
-            </a:extLst>
-          </p:cNvPr>
+            <a:endParaRPr lang="en-US" dirty="0"/>
+          </a:p>
+        </p:txBody>
+      </p:sp>
+      <p:sp>
+        <p:nvSpPr>
+          <p:cNvPr id="3" name="Subtitle 2"/>
           <p:cNvSpPr>
             <a:spLocks noGrp="1"/>
           </p:cNvSpPr>
@@ -188,8 +177,8 @@
         </p:nvSpPr>
         <p:spPr>
           <a:xfrm>
-            <a:off x="1524000" y="3602038"/>
-            <a:ext cx="9144000" cy="1655762"/>
+            <a:off x="2514600" y="5763261"/>
+            <a:ext cx="15087600" cy="2649219"/>
           </a:xfrm>
         </p:spPr>
         <p:txBody>
@@ -197,39 +186,39 @@
           <a:lstStyle>
             <a:lvl1pPr marL="0" indent="0" algn="ctr">
               <a:buNone/>
-              <a:defRPr sz="2400"/>
+              <a:defRPr sz="3840"/>
             </a:lvl1pPr>
-            <a:lvl2pPr marL="457200" indent="0" algn="ctr">
-              <a:buNone/>
-              <a:defRPr sz="2000"/>
+            <a:lvl2pPr marL="731520" indent="0" algn="ctr">
+              <a:buNone/>
+              <a:defRPr sz="3200"/>
             </a:lvl2pPr>
-            <a:lvl3pPr marL="914400" indent="0" algn="ctr">
-              <a:buNone/>
-              <a:defRPr sz="1800"/>
+            <a:lvl3pPr marL="1463040" indent="0" algn="ctr">
+              <a:buNone/>
+              <a:defRPr sz="2880"/>
             </a:lvl3pPr>
-            <a:lvl4pPr marL="1371600" indent="0" algn="ctr">
-              <a:buNone/>
-              <a:defRPr sz="1600"/>
+            <a:lvl4pPr marL="2194560" indent="0" algn="ctr">
+              <a:buNone/>
+              <a:defRPr sz="2560"/>
             </a:lvl4pPr>
-            <a:lvl5pPr marL="1828800" indent="0" algn="ctr">
-              <a:buNone/>
-              <a:defRPr sz="1600"/>
+            <a:lvl5pPr marL="2926080" indent="0" algn="ctr">
+              <a:buNone/>
+              <a:defRPr sz="2560"/>
             </a:lvl5pPr>
-            <a:lvl6pPr marL="2286000" indent="0" algn="ctr">
-              <a:buNone/>
-              <a:defRPr sz="1600"/>
+            <a:lvl6pPr marL="3657600" indent="0" algn="ctr">
+              <a:buNone/>
+              <a:defRPr sz="2560"/>
             </a:lvl6pPr>
-            <a:lvl7pPr marL="2743200" indent="0" algn="ctr">
-              <a:buNone/>
-              <a:defRPr sz="1600"/>
+            <a:lvl7pPr marL="4389120" indent="0" algn="ctr">
+              <a:buNone/>
+              <a:defRPr sz="2560"/>
             </a:lvl7pPr>
-            <a:lvl8pPr marL="3200400" indent="0" algn="ctr">
-              <a:buNone/>
-              <a:defRPr sz="1600"/>
+            <a:lvl8pPr marL="5120640" indent="0" algn="ctr">
+              <a:buNone/>
+              <a:defRPr sz="2560"/>
             </a:lvl8pPr>
-            <a:lvl9pPr marL="3657600" indent="0" algn="ctr">
-              <a:buNone/>
-              <a:defRPr sz="1600"/>
+            <a:lvl9pPr marL="5852160" indent="0" algn="ctr">
+              <a:buNone/>
+              <a:defRPr sz="2560"/>
             </a:lvl9pPr>
           </a:lstStyle>
           <a:p>
@@ -237,19 +226,13 @@
               <a:rPr lang="en-US"/>
               <a:t>Click to edit Master subtitle style</a:t>
             </a:r>
-            <a:endParaRPr lang="ar-EG"/>
-          </a:p>
-        </p:txBody>
-      </p:sp>
-      <p:sp>
-        <p:nvSpPr>
-          <p:cNvPr id="4" name="Date Placeholder 3">
-            <a:extLst>
-              <a:ext uri="{FF2B5EF4-FFF2-40B4-BE49-F238E27FC236}">
-                <a16:creationId xmlns:a16="http://schemas.microsoft.com/office/drawing/2014/main" id="{02A141D6-9A2A-40EF-93D4-68F7DC5C48E4}"/>
-              </a:ext>
-            </a:extLst>
-          </p:cNvPr>
+            <a:endParaRPr lang="en-US" dirty="0"/>
+          </a:p>
+        </p:txBody>
+      </p:sp>
+      <p:sp>
+        <p:nvSpPr>
+          <p:cNvPr id="4" name="Date Placeholder 3"/>
           <p:cNvSpPr>
             <a:spLocks noGrp="1"/>
           </p:cNvSpPr>
@@ -264,7 +247,7 @@
           <a:p>
             <a:fld id="{E73D85F0-5B66-4BE3-8DE5-F98511BA27F7}" type="datetimeFigureOut">
               <a:rPr lang="ar-EG" smtClean="0"/>
-              <a:t>28/02/1446</a:t>
+              <a:t>21/01/1447</a:t>
             </a:fld>
             <a:endParaRPr lang="ar-EG"/>
           </a:p>
@@ -272,13 +255,7 @@
       </p:sp>
       <p:sp>
         <p:nvSpPr>
-          <p:cNvPr id="5" name="Footer Placeholder 4">
-            <a:extLst>
-              <a:ext uri="{FF2B5EF4-FFF2-40B4-BE49-F238E27FC236}">
-                <a16:creationId xmlns:a16="http://schemas.microsoft.com/office/drawing/2014/main" id="{A4CA738B-213F-4F2D-BE22-911D764C9326}"/>
-              </a:ext>
-            </a:extLst>
-          </p:cNvPr>
+          <p:cNvPr id="5" name="Footer Placeholder 4"/>
           <p:cNvSpPr>
             <a:spLocks noGrp="1"/>
           </p:cNvSpPr>
@@ -297,13 +274,7 @@
       </p:sp>
       <p:sp>
         <p:nvSpPr>
-          <p:cNvPr id="6" name="Slide Number Placeholder 5">
-            <a:extLst>
-              <a:ext uri="{FF2B5EF4-FFF2-40B4-BE49-F238E27FC236}">
-                <a16:creationId xmlns:a16="http://schemas.microsoft.com/office/drawing/2014/main" id="{4B23CDAD-086F-4F9D-B282-0D6E4663334E}"/>
-              </a:ext>
-            </a:extLst>
-          </p:cNvPr>
+          <p:cNvPr id="6" name="Slide Number Placeholder 5"/>
           <p:cNvSpPr>
             <a:spLocks noGrp="1"/>
           </p:cNvSpPr>
@@ -327,7 +298,7 @@
     </p:spTree>
     <p:extLst>
       <p:ext uri="{BB962C8B-B14F-4D97-AF65-F5344CB8AC3E}">
-        <p14:creationId xmlns:p14="http://schemas.microsoft.com/office/powerpoint/2010/main" val="2431168069"/>
+        <p14:creationId xmlns:p14="http://schemas.microsoft.com/office/powerpoint/2010/main" val="1199455139"/>
       </p:ext>
     </p:extLst>
   </p:cSld>
@@ -356,13 +327,7 @@
       </p:grpSpPr>
       <p:sp>
         <p:nvSpPr>
-          <p:cNvPr id="2" name="Title 1">
-            <a:extLst>
-              <a:ext uri="{FF2B5EF4-FFF2-40B4-BE49-F238E27FC236}">
-                <a16:creationId xmlns:a16="http://schemas.microsoft.com/office/drawing/2014/main" id="{279D8B4F-B0E4-43BD-BF79-71B716EC3612}"/>
-              </a:ext>
-            </a:extLst>
-          </p:cNvPr>
+          <p:cNvPr id="2" name="Title 1"/>
           <p:cNvSpPr>
             <a:spLocks noGrp="1"/>
           </p:cNvSpPr>
@@ -379,19 +344,13 @@
               <a:rPr lang="en-US"/>
               <a:t>Click to edit Master title style</a:t>
             </a:r>
-            <a:endParaRPr lang="ar-EG"/>
-          </a:p>
-        </p:txBody>
-      </p:sp>
-      <p:sp>
-        <p:nvSpPr>
-          <p:cNvPr id="3" name="Vertical Text Placeholder 2">
-            <a:extLst>
-              <a:ext uri="{FF2B5EF4-FFF2-40B4-BE49-F238E27FC236}">
-                <a16:creationId xmlns:a16="http://schemas.microsoft.com/office/drawing/2014/main" id="{EB6DD699-30F4-4A5A-AEBA-2D6AFE9AB036}"/>
-              </a:ext>
-            </a:extLst>
-          </p:cNvPr>
+            <a:endParaRPr lang="en-US" dirty="0"/>
+          </a:p>
+        </p:txBody>
+      </p:sp>
+      <p:sp>
+        <p:nvSpPr>
+          <p:cNvPr id="3" name="Vertical Text Placeholder 2"/>
           <p:cNvSpPr>
             <a:spLocks noGrp="1"/>
           </p:cNvSpPr>
@@ -437,19 +396,13 @@
               <a:rPr lang="en-US"/>
               <a:t>Fifth level</a:t>
             </a:r>
-            <a:endParaRPr lang="ar-EG"/>
-          </a:p>
-        </p:txBody>
-      </p:sp>
-      <p:sp>
-        <p:nvSpPr>
-          <p:cNvPr id="4" name="Date Placeholder 3">
-            <a:extLst>
-              <a:ext uri="{FF2B5EF4-FFF2-40B4-BE49-F238E27FC236}">
-                <a16:creationId xmlns:a16="http://schemas.microsoft.com/office/drawing/2014/main" id="{2131DA5F-DF91-42A7-B798-1231CAC3DAC6}"/>
-              </a:ext>
-            </a:extLst>
-          </p:cNvPr>
+            <a:endParaRPr lang="en-US" dirty="0"/>
+          </a:p>
+        </p:txBody>
+      </p:sp>
+      <p:sp>
+        <p:nvSpPr>
+          <p:cNvPr id="4" name="Date Placeholder 3"/>
           <p:cNvSpPr>
             <a:spLocks noGrp="1"/>
           </p:cNvSpPr>
@@ -464,7 +417,7 @@
           <a:p>
             <a:fld id="{E73D85F0-5B66-4BE3-8DE5-F98511BA27F7}" type="datetimeFigureOut">
               <a:rPr lang="ar-EG" smtClean="0"/>
-              <a:t>28/02/1446</a:t>
+              <a:t>21/01/1447</a:t>
             </a:fld>
             <a:endParaRPr lang="ar-EG"/>
           </a:p>
@@ -472,13 +425,7 @@
       </p:sp>
       <p:sp>
         <p:nvSpPr>
-          <p:cNvPr id="5" name="Footer Placeholder 4">
-            <a:extLst>
-              <a:ext uri="{FF2B5EF4-FFF2-40B4-BE49-F238E27FC236}">
-                <a16:creationId xmlns:a16="http://schemas.microsoft.com/office/drawing/2014/main" id="{52091E92-2E0A-42BD-88DB-199EDE962E63}"/>
-              </a:ext>
-            </a:extLst>
-          </p:cNvPr>
+          <p:cNvPr id="5" name="Footer Placeholder 4"/>
           <p:cNvSpPr>
             <a:spLocks noGrp="1"/>
           </p:cNvSpPr>
@@ -497,13 +444,7 @@
       </p:sp>
       <p:sp>
         <p:nvSpPr>
-          <p:cNvPr id="6" name="Slide Number Placeholder 5">
-            <a:extLst>
-              <a:ext uri="{FF2B5EF4-FFF2-40B4-BE49-F238E27FC236}">
-                <a16:creationId xmlns:a16="http://schemas.microsoft.com/office/drawing/2014/main" id="{16750CCE-E91B-4BE0-B943-611EF3A882BE}"/>
-              </a:ext>
-            </a:extLst>
-          </p:cNvPr>
+          <p:cNvPr id="6" name="Slide Number Placeholder 5"/>
           <p:cNvSpPr>
             <a:spLocks noGrp="1"/>
           </p:cNvSpPr>
@@ -527,7 +468,7 @@
     </p:spTree>
     <p:extLst>
       <p:ext uri="{BB962C8B-B14F-4D97-AF65-F5344CB8AC3E}">
-        <p14:creationId xmlns:p14="http://schemas.microsoft.com/office/powerpoint/2010/main" val="3020914150"/>
+        <p14:creationId xmlns:p14="http://schemas.microsoft.com/office/powerpoint/2010/main" val="702794025"/>
       </p:ext>
     </p:extLst>
   </p:cSld>
@@ -556,13 +497,7 @@
       </p:grpSpPr>
       <p:sp>
         <p:nvSpPr>
-          <p:cNvPr id="2" name="Vertical Title 1">
-            <a:extLst>
-              <a:ext uri="{FF2B5EF4-FFF2-40B4-BE49-F238E27FC236}">
-                <a16:creationId xmlns:a16="http://schemas.microsoft.com/office/drawing/2014/main" id="{9714DF62-6947-44BF-9E8B-23A11DE12488}"/>
-              </a:ext>
-            </a:extLst>
-          </p:cNvPr>
+          <p:cNvPr id="2" name="Vertical Title 1"/>
           <p:cNvSpPr>
             <a:spLocks noGrp="1"/>
           </p:cNvSpPr>
@@ -572,8 +507,8 @@
         </p:nvSpPr>
         <p:spPr>
           <a:xfrm>
-            <a:off x="8724900" y="365125"/>
-            <a:ext cx="2628900" cy="5811838"/>
+            <a:off x="14396085" y="584200"/>
+            <a:ext cx="4337685" cy="9298941"/>
           </a:xfrm>
         </p:spPr>
         <p:txBody>
@@ -584,19 +519,13 @@
               <a:rPr lang="en-US"/>
               <a:t>Click to edit Master title style</a:t>
             </a:r>
-            <a:endParaRPr lang="ar-EG"/>
-          </a:p>
-        </p:txBody>
-      </p:sp>
-      <p:sp>
-        <p:nvSpPr>
-          <p:cNvPr id="3" name="Vertical Text Placeholder 2">
-            <a:extLst>
-              <a:ext uri="{FF2B5EF4-FFF2-40B4-BE49-F238E27FC236}">
-                <a16:creationId xmlns:a16="http://schemas.microsoft.com/office/drawing/2014/main" id="{30926D05-347A-4405-B705-33BA80D326F7}"/>
-              </a:ext>
-            </a:extLst>
-          </p:cNvPr>
+            <a:endParaRPr lang="en-US" dirty="0"/>
+          </a:p>
+        </p:txBody>
+      </p:sp>
+      <p:sp>
+        <p:nvSpPr>
+          <p:cNvPr id="3" name="Vertical Text Placeholder 2"/>
           <p:cNvSpPr>
             <a:spLocks noGrp="1"/>
           </p:cNvSpPr>
@@ -606,8 +535,8 @@
         </p:nvSpPr>
         <p:spPr>
           <a:xfrm>
-            <a:off x="838200" y="365125"/>
-            <a:ext cx="7734300" cy="5811838"/>
+            <a:off x="1383030" y="584200"/>
+            <a:ext cx="12761595" cy="9298941"/>
           </a:xfrm>
         </p:spPr>
         <p:txBody>
@@ -647,19 +576,13 @@
               <a:rPr lang="en-US"/>
               <a:t>Fifth level</a:t>
             </a:r>
-            <a:endParaRPr lang="ar-EG"/>
-          </a:p>
-        </p:txBody>
-      </p:sp>
-      <p:sp>
-        <p:nvSpPr>
-          <p:cNvPr id="4" name="Date Placeholder 3">
-            <a:extLst>
-              <a:ext uri="{FF2B5EF4-FFF2-40B4-BE49-F238E27FC236}">
-                <a16:creationId xmlns:a16="http://schemas.microsoft.com/office/drawing/2014/main" id="{62B92EEA-9D69-4D02-9D1B-38E802F19F05}"/>
-              </a:ext>
-            </a:extLst>
-          </p:cNvPr>
+            <a:endParaRPr lang="en-US" dirty="0"/>
+          </a:p>
+        </p:txBody>
+      </p:sp>
+      <p:sp>
+        <p:nvSpPr>
+          <p:cNvPr id="4" name="Date Placeholder 3"/>
           <p:cNvSpPr>
             <a:spLocks noGrp="1"/>
           </p:cNvSpPr>
@@ -674,7 +597,7 @@
           <a:p>
             <a:fld id="{E73D85F0-5B66-4BE3-8DE5-F98511BA27F7}" type="datetimeFigureOut">
               <a:rPr lang="ar-EG" smtClean="0"/>
-              <a:t>28/02/1446</a:t>
+              <a:t>21/01/1447</a:t>
             </a:fld>
             <a:endParaRPr lang="ar-EG"/>
           </a:p>
@@ -682,13 +605,7 @@
       </p:sp>
       <p:sp>
         <p:nvSpPr>
-          <p:cNvPr id="5" name="Footer Placeholder 4">
-            <a:extLst>
-              <a:ext uri="{FF2B5EF4-FFF2-40B4-BE49-F238E27FC236}">
-                <a16:creationId xmlns:a16="http://schemas.microsoft.com/office/drawing/2014/main" id="{B2FAD35A-99E0-47CF-8E11-CFAF8DFC7E4C}"/>
-              </a:ext>
-            </a:extLst>
-          </p:cNvPr>
+          <p:cNvPr id="5" name="Footer Placeholder 4"/>
           <p:cNvSpPr>
             <a:spLocks noGrp="1"/>
           </p:cNvSpPr>
@@ -707,13 +624,7 @@
       </p:sp>
       <p:sp>
         <p:nvSpPr>
-          <p:cNvPr id="6" name="Slide Number Placeholder 5">
-            <a:extLst>
-              <a:ext uri="{FF2B5EF4-FFF2-40B4-BE49-F238E27FC236}">
-                <a16:creationId xmlns:a16="http://schemas.microsoft.com/office/drawing/2014/main" id="{70F75C7F-43CD-41DC-919F-019DA2DCF4CA}"/>
-              </a:ext>
-            </a:extLst>
-          </p:cNvPr>
+          <p:cNvPr id="6" name="Slide Number Placeholder 5"/>
           <p:cNvSpPr>
             <a:spLocks noGrp="1"/>
           </p:cNvSpPr>
@@ -737,7 +648,7 @@
     </p:spTree>
     <p:extLst>
       <p:ext uri="{BB962C8B-B14F-4D97-AF65-F5344CB8AC3E}">
-        <p14:creationId xmlns:p14="http://schemas.microsoft.com/office/powerpoint/2010/main" val="3955766988"/>
+        <p14:creationId xmlns:p14="http://schemas.microsoft.com/office/powerpoint/2010/main" val="3034335378"/>
       </p:ext>
     </p:extLst>
   </p:cSld>
@@ -766,13 +677,7 @@
       </p:grpSpPr>
       <p:sp>
         <p:nvSpPr>
-          <p:cNvPr id="2" name="Title 1">
-            <a:extLst>
-              <a:ext uri="{FF2B5EF4-FFF2-40B4-BE49-F238E27FC236}">
-                <a16:creationId xmlns:a16="http://schemas.microsoft.com/office/drawing/2014/main" id="{DADB1A54-E3E2-4CB5-9C15-AC52A5543E67}"/>
-              </a:ext>
-            </a:extLst>
-          </p:cNvPr>
+          <p:cNvPr id="2" name="Title 1"/>
           <p:cNvSpPr>
             <a:spLocks noGrp="1"/>
           </p:cNvSpPr>
@@ -789,19 +694,13 @@
               <a:rPr lang="en-US"/>
               <a:t>Click to edit Master title style</a:t>
             </a:r>
-            <a:endParaRPr lang="ar-EG"/>
-          </a:p>
-        </p:txBody>
-      </p:sp>
-      <p:sp>
-        <p:nvSpPr>
-          <p:cNvPr id="3" name="Content Placeholder 2">
-            <a:extLst>
-              <a:ext uri="{FF2B5EF4-FFF2-40B4-BE49-F238E27FC236}">
-                <a16:creationId xmlns:a16="http://schemas.microsoft.com/office/drawing/2014/main" id="{B898FF9D-5436-4956-895F-B975C265AF84}"/>
-              </a:ext>
-            </a:extLst>
-          </p:cNvPr>
+            <a:endParaRPr lang="en-US" dirty="0"/>
+          </a:p>
+        </p:txBody>
+      </p:sp>
+      <p:sp>
+        <p:nvSpPr>
+          <p:cNvPr id="3" name="Content Placeholder 2"/>
           <p:cNvSpPr>
             <a:spLocks noGrp="1"/>
           </p:cNvSpPr>
@@ -847,19 +746,13 @@
               <a:rPr lang="en-US"/>
               <a:t>Fifth level</a:t>
             </a:r>
-            <a:endParaRPr lang="ar-EG"/>
-          </a:p>
-        </p:txBody>
-      </p:sp>
-      <p:sp>
-        <p:nvSpPr>
-          <p:cNvPr id="4" name="Date Placeholder 3">
-            <a:extLst>
-              <a:ext uri="{FF2B5EF4-FFF2-40B4-BE49-F238E27FC236}">
-                <a16:creationId xmlns:a16="http://schemas.microsoft.com/office/drawing/2014/main" id="{32A9DEFA-8E5F-4EA8-86BF-20D2771F7307}"/>
-              </a:ext>
-            </a:extLst>
-          </p:cNvPr>
+            <a:endParaRPr lang="en-US" dirty="0"/>
+          </a:p>
+        </p:txBody>
+      </p:sp>
+      <p:sp>
+        <p:nvSpPr>
+          <p:cNvPr id="4" name="Date Placeholder 3"/>
           <p:cNvSpPr>
             <a:spLocks noGrp="1"/>
           </p:cNvSpPr>
@@ -874,7 +767,7 @@
           <a:p>
             <a:fld id="{E73D85F0-5B66-4BE3-8DE5-F98511BA27F7}" type="datetimeFigureOut">
               <a:rPr lang="ar-EG" smtClean="0"/>
-              <a:t>28/02/1446</a:t>
+              <a:t>21/01/1447</a:t>
             </a:fld>
             <a:endParaRPr lang="ar-EG"/>
           </a:p>
@@ -882,13 +775,7 @@
       </p:sp>
       <p:sp>
         <p:nvSpPr>
-          <p:cNvPr id="5" name="Footer Placeholder 4">
-            <a:extLst>
-              <a:ext uri="{FF2B5EF4-FFF2-40B4-BE49-F238E27FC236}">
-                <a16:creationId xmlns:a16="http://schemas.microsoft.com/office/drawing/2014/main" id="{3240C9AA-BAA2-44E5-8FF1-4BE275810D7E}"/>
-              </a:ext>
-            </a:extLst>
-          </p:cNvPr>
+          <p:cNvPr id="5" name="Footer Placeholder 4"/>
           <p:cNvSpPr>
             <a:spLocks noGrp="1"/>
           </p:cNvSpPr>
@@ -907,13 +794,7 @@
       </p:sp>
       <p:sp>
         <p:nvSpPr>
-          <p:cNvPr id="6" name="Slide Number Placeholder 5">
-            <a:extLst>
-              <a:ext uri="{FF2B5EF4-FFF2-40B4-BE49-F238E27FC236}">
-                <a16:creationId xmlns:a16="http://schemas.microsoft.com/office/drawing/2014/main" id="{65A5195E-FEFE-445A-8278-289D14B889D4}"/>
-              </a:ext>
-            </a:extLst>
-          </p:cNvPr>
+          <p:cNvPr id="6" name="Slide Number Placeholder 5"/>
           <p:cNvSpPr>
             <a:spLocks noGrp="1"/>
           </p:cNvSpPr>
@@ -937,7 +818,7 @@
     </p:spTree>
     <p:extLst>
       <p:ext uri="{BB962C8B-B14F-4D97-AF65-F5344CB8AC3E}">
-        <p14:creationId xmlns:p14="http://schemas.microsoft.com/office/powerpoint/2010/main" val="976134067"/>
+        <p14:creationId xmlns:p14="http://schemas.microsoft.com/office/powerpoint/2010/main" val="3904072888"/>
       </p:ext>
     </p:extLst>
   </p:cSld>
@@ -966,13 +847,7 @@
       </p:grpSpPr>
       <p:sp>
         <p:nvSpPr>
-          <p:cNvPr id="2" name="Title 1">
-            <a:extLst>
-              <a:ext uri="{FF2B5EF4-FFF2-40B4-BE49-F238E27FC236}">
-                <a16:creationId xmlns:a16="http://schemas.microsoft.com/office/drawing/2014/main" id="{FF0E6348-AB6F-4B3D-886B-FD681E13FF6A}"/>
-              </a:ext>
-            </a:extLst>
-          </p:cNvPr>
+          <p:cNvPr id="2" name="Title 1"/>
           <p:cNvSpPr>
             <a:spLocks noGrp="1"/>
           </p:cNvSpPr>
@@ -982,15 +857,15 @@
         </p:nvSpPr>
         <p:spPr>
           <a:xfrm>
-            <a:off x="831850" y="1709738"/>
-            <a:ext cx="10515600" cy="2852737"/>
+            <a:off x="1372553" y="2735582"/>
+            <a:ext cx="17350740" cy="4564379"/>
           </a:xfrm>
         </p:spPr>
         <p:txBody>
           <a:bodyPr anchor="b"/>
           <a:lstStyle>
             <a:lvl1pPr>
-              <a:defRPr sz="6000"/>
+              <a:defRPr sz="9600"/>
             </a:lvl1pPr>
           </a:lstStyle>
           <a:p>
@@ -998,19 +873,13 @@
               <a:rPr lang="en-US"/>
               <a:t>Click to edit Master title style</a:t>
             </a:r>
-            <a:endParaRPr lang="ar-EG"/>
-          </a:p>
-        </p:txBody>
-      </p:sp>
-      <p:sp>
-        <p:nvSpPr>
-          <p:cNvPr id="3" name="Text Placeholder 2">
-            <a:extLst>
-              <a:ext uri="{FF2B5EF4-FFF2-40B4-BE49-F238E27FC236}">
-                <a16:creationId xmlns:a16="http://schemas.microsoft.com/office/drawing/2014/main" id="{0844E386-3807-4400-A911-0E3F304CA71F}"/>
-              </a:ext>
-            </a:extLst>
-          </p:cNvPr>
+            <a:endParaRPr lang="en-US" dirty="0"/>
+          </a:p>
+        </p:txBody>
+      </p:sp>
+      <p:sp>
+        <p:nvSpPr>
+          <p:cNvPr id="3" name="Text Placeholder 2"/>
           <p:cNvSpPr>
             <a:spLocks noGrp="1"/>
           </p:cNvSpPr>
@@ -1020,8 +889,8 @@
         </p:nvSpPr>
         <p:spPr>
           <a:xfrm>
-            <a:off x="831850" y="4589463"/>
-            <a:ext cx="10515600" cy="1500187"/>
+            <a:off x="1372553" y="7343142"/>
+            <a:ext cx="17350740" cy="2400299"/>
           </a:xfrm>
         </p:spPr>
         <p:txBody>
@@ -1029,7 +898,7 @@
           <a:lstStyle>
             <a:lvl1pPr marL="0" indent="0">
               <a:buNone/>
-              <a:defRPr sz="2400">
+              <a:defRPr sz="3840">
                 <a:solidFill>
                   <a:schemeClr val="tx1">
                     <a:tint val="75000"/>
@@ -1037,9 +906,9 @@
                 </a:solidFill>
               </a:defRPr>
             </a:lvl1pPr>
-            <a:lvl2pPr marL="457200" indent="0">
-              <a:buNone/>
-              <a:defRPr sz="2000">
+            <a:lvl2pPr marL="731520" indent="0">
+              <a:buNone/>
+              <a:defRPr sz="3200">
                 <a:solidFill>
                   <a:schemeClr val="tx1">
                     <a:tint val="75000"/>
@@ -1047,9 +916,9 @@
                 </a:solidFill>
               </a:defRPr>
             </a:lvl2pPr>
-            <a:lvl3pPr marL="914400" indent="0">
-              <a:buNone/>
-              <a:defRPr sz="1800">
+            <a:lvl3pPr marL="1463040" indent="0">
+              <a:buNone/>
+              <a:defRPr sz="2880">
                 <a:solidFill>
                   <a:schemeClr val="tx1">
                     <a:tint val="75000"/>
@@ -1057,9 +926,9 @@
                 </a:solidFill>
               </a:defRPr>
             </a:lvl3pPr>
-            <a:lvl4pPr marL="1371600" indent="0">
-              <a:buNone/>
-              <a:defRPr sz="1600">
+            <a:lvl4pPr marL="2194560" indent="0">
+              <a:buNone/>
+              <a:defRPr sz="2560">
                 <a:solidFill>
                   <a:schemeClr val="tx1">
                     <a:tint val="75000"/>
@@ -1067,9 +936,9 @@
                 </a:solidFill>
               </a:defRPr>
             </a:lvl4pPr>
-            <a:lvl5pPr marL="1828800" indent="0">
-              <a:buNone/>
-              <a:defRPr sz="1600">
+            <a:lvl5pPr marL="2926080" indent="0">
+              <a:buNone/>
+              <a:defRPr sz="2560">
                 <a:solidFill>
                   <a:schemeClr val="tx1">
                     <a:tint val="75000"/>
@@ -1077,9 +946,9 @@
                 </a:solidFill>
               </a:defRPr>
             </a:lvl5pPr>
-            <a:lvl6pPr marL="2286000" indent="0">
-              <a:buNone/>
-              <a:defRPr sz="1600">
+            <a:lvl6pPr marL="3657600" indent="0">
+              <a:buNone/>
+              <a:defRPr sz="2560">
                 <a:solidFill>
                   <a:schemeClr val="tx1">
                     <a:tint val="75000"/>
@@ -1087,9 +956,9 @@
                 </a:solidFill>
               </a:defRPr>
             </a:lvl6pPr>
-            <a:lvl7pPr marL="2743200" indent="0">
-              <a:buNone/>
-              <a:defRPr sz="1600">
+            <a:lvl7pPr marL="4389120" indent="0">
+              <a:buNone/>
+              <a:defRPr sz="2560">
                 <a:solidFill>
                   <a:schemeClr val="tx1">
                     <a:tint val="75000"/>
@@ -1097,9 +966,9 @@
                 </a:solidFill>
               </a:defRPr>
             </a:lvl7pPr>
-            <a:lvl8pPr marL="3200400" indent="0">
-              <a:buNone/>
-              <a:defRPr sz="1600">
+            <a:lvl8pPr marL="5120640" indent="0">
+              <a:buNone/>
+              <a:defRPr sz="2560">
                 <a:solidFill>
                   <a:schemeClr val="tx1">
                     <a:tint val="75000"/>
@@ -1107,9 +976,9 @@
                 </a:solidFill>
               </a:defRPr>
             </a:lvl8pPr>
-            <a:lvl9pPr marL="3657600" indent="0">
-              <a:buNone/>
-              <a:defRPr sz="1600">
+            <a:lvl9pPr marL="5852160" indent="0">
+              <a:buNone/>
+              <a:defRPr sz="2560">
                 <a:solidFill>
                   <a:schemeClr val="tx1">
                     <a:tint val="75000"/>
@@ -1129,13 +998,7 @@
       </p:sp>
       <p:sp>
         <p:nvSpPr>
-          <p:cNvPr id="4" name="Date Placeholder 3">
-            <a:extLst>
-              <a:ext uri="{FF2B5EF4-FFF2-40B4-BE49-F238E27FC236}">
-                <a16:creationId xmlns:a16="http://schemas.microsoft.com/office/drawing/2014/main" id="{F2D601D1-6962-45AE-A27E-298459C9151E}"/>
-              </a:ext>
-            </a:extLst>
-          </p:cNvPr>
+          <p:cNvPr id="4" name="Date Placeholder 3"/>
           <p:cNvSpPr>
             <a:spLocks noGrp="1"/>
           </p:cNvSpPr>
@@ -1150,7 +1013,7 @@
           <a:p>
             <a:fld id="{E73D85F0-5B66-4BE3-8DE5-F98511BA27F7}" type="datetimeFigureOut">
               <a:rPr lang="ar-EG" smtClean="0"/>
-              <a:t>28/02/1446</a:t>
+              <a:t>21/01/1447</a:t>
             </a:fld>
             <a:endParaRPr lang="ar-EG"/>
           </a:p>
@@ -1158,13 +1021,7 @@
       </p:sp>
       <p:sp>
         <p:nvSpPr>
-          <p:cNvPr id="5" name="Footer Placeholder 4">
-            <a:extLst>
-              <a:ext uri="{FF2B5EF4-FFF2-40B4-BE49-F238E27FC236}">
-                <a16:creationId xmlns:a16="http://schemas.microsoft.com/office/drawing/2014/main" id="{D56D47EC-C45D-4866-817A-3CF0BC4D16A2}"/>
-              </a:ext>
-            </a:extLst>
-          </p:cNvPr>
+          <p:cNvPr id="5" name="Footer Placeholder 4"/>
           <p:cNvSpPr>
             <a:spLocks noGrp="1"/>
           </p:cNvSpPr>
@@ -1183,13 +1040,7 @@
       </p:sp>
       <p:sp>
         <p:nvSpPr>
-          <p:cNvPr id="6" name="Slide Number Placeholder 5">
-            <a:extLst>
-              <a:ext uri="{FF2B5EF4-FFF2-40B4-BE49-F238E27FC236}">
-                <a16:creationId xmlns:a16="http://schemas.microsoft.com/office/drawing/2014/main" id="{90883880-EA1B-40CB-ABE7-042D65C6FE6C}"/>
-              </a:ext>
-            </a:extLst>
-          </p:cNvPr>
+          <p:cNvPr id="6" name="Slide Number Placeholder 5"/>
           <p:cNvSpPr>
             <a:spLocks noGrp="1"/>
           </p:cNvSpPr>
@@ -1213,7 +1064,7 @@
     </p:spTree>
     <p:extLst>
       <p:ext uri="{BB962C8B-B14F-4D97-AF65-F5344CB8AC3E}">
-        <p14:creationId xmlns:p14="http://schemas.microsoft.com/office/powerpoint/2010/main" val="4068186768"/>
+        <p14:creationId xmlns:p14="http://schemas.microsoft.com/office/powerpoint/2010/main" val="2783032459"/>
       </p:ext>
     </p:extLst>
   </p:cSld>
@@ -1242,13 +1093,7 @@
       </p:grpSpPr>
       <p:sp>
         <p:nvSpPr>
-          <p:cNvPr id="2" name="Title 1">
-            <a:extLst>
-              <a:ext uri="{FF2B5EF4-FFF2-40B4-BE49-F238E27FC236}">
-                <a16:creationId xmlns:a16="http://schemas.microsoft.com/office/drawing/2014/main" id="{D8E14B33-3992-4A74-AA3D-EFF1BAE15412}"/>
-              </a:ext>
-            </a:extLst>
-          </p:cNvPr>
+          <p:cNvPr id="2" name="Title 1"/>
           <p:cNvSpPr>
             <a:spLocks noGrp="1"/>
           </p:cNvSpPr>
@@ -1265,19 +1110,13 @@
               <a:rPr lang="en-US"/>
               <a:t>Click to edit Master title style</a:t>
             </a:r>
-            <a:endParaRPr lang="ar-EG"/>
-          </a:p>
-        </p:txBody>
-      </p:sp>
-      <p:sp>
-        <p:nvSpPr>
-          <p:cNvPr id="3" name="Content Placeholder 2">
-            <a:extLst>
-              <a:ext uri="{FF2B5EF4-FFF2-40B4-BE49-F238E27FC236}">
-                <a16:creationId xmlns:a16="http://schemas.microsoft.com/office/drawing/2014/main" id="{01EC9A3B-2191-466D-B737-8434BA4FEBB7}"/>
-              </a:ext>
-            </a:extLst>
-          </p:cNvPr>
+            <a:endParaRPr lang="en-US" dirty="0"/>
+          </a:p>
+        </p:txBody>
+      </p:sp>
+      <p:sp>
+        <p:nvSpPr>
+          <p:cNvPr id="3" name="Content Placeholder 2"/>
           <p:cNvSpPr>
             <a:spLocks noGrp="1"/>
           </p:cNvSpPr>
@@ -1287,8 +1126,8 @@
         </p:nvSpPr>
         <p:spPr>
           <a:xfrm>
-            <a:off x="838200" y="1825625"/>
-            <a:ext cx="5181600" cy="4351338"/>
+            <a:off x="1383030" y="2921000"/>
+            <a:ext cx="8549640" cy="6962141"/>
           </a:xfrm>
         </p:spPr>
         <p:txBody>
@@ -1328,19 +1167,13 @@
               <a:rPr lang="en-US"/>
               <a:t>Fifth level</a:t>
             </a:r>
-            <a:endParaRPr lang="ar-EG"/>
-          </a:p>
-        </p:txBody>
-      </p:sp>
-      <p:sp>
-        <p:nvSpPr>
-          <p:cNvPr id="4" name="Content Placeholder 3">
-            <a:extLst>
-              <a:ext uri="{FF2B5EF4-FFF2-40B4-BE49-F238E27FC236}">
-                <a16:creationId xmlns:a16="http://schemas.microsoft.com/office/drawing/2014/main" id="{5AA67EDB-50ED-40AC-AB40-AB54AA1CADB3}"/>
-              </a:ext>
-            </a:extLst>
-          </p:cNvPr>
+            <a:endParaRPr lang="en-US" dirty="0"/>
+          </a:p>
+        </p:txBody>
+      </p:sp>
+      <p:sp>
+        <p:nvSpPr>
+          <p:cNvPr id="4" name="Content Placeholder 3"/>
           <p:cNvSpPr>
             <a:spLocks noGrp="1"/>
           </p:cNvSpPr>
@@ -1350,8 +1183,8 @@
         </p:nvSpPr>
         <p:spPr>
           <a:xfrm>
-            <a:off x="6172200" y="1825625"/>
-            <a:ext cx="5181600" cy="4351338"/>
+            <a:off x="10184130" y="2921000"/>
+            <a:ext cx="8549640" cy="6962141"/>
           </a:xfrm>
         </p:spPr>
         <p:txBody>
@@ -1391,19 +1224,13 @@
               <a:rPr lang="en-US"/>
               <a:t>Fifth level</a:t>
             </a:r>
-            <a:endParaRPr lang="ar-EG"/>
-          </a:p>
-        </p:txBody>
-      </p:sp>
-      <p:sp>
-        <p:nvSpPr>
-          <p:cNvPr id="5" name="Date Placeholder 4">
-            <a:extLst>
-              <a:ext uri="{FF2B5EF4-FFF2-40B4-BE49-F238E27FC236}">
-                <a16:creationId xmlns:a16="http://schemas.microsoft.com/office/drawing/2014/main" id="{EEBFDECD-256A-428F-82B2-3E6567CDF32E}"/>
-              </a:ext>
-            </a:extLst>
-          </p:cNvPr>
+            <a:endParaRPr lang="en-US" dirty="0"/>
+          </a:p>
+        </p:txBody>
+      </p:sp>
+      <p:sp>
+        <p:nvSpPr>
+          <p:cNvPr id="5" name="Date Placeholder 4"/>
           <p:cNvSpPr>
             <a:spLocks noGrp="1"/>
           </p:cNvSpPr>
@@ -1418,7 +1245,7 @@
           <a:p>
             <a:fld id="{E73D85F0-5B66-4BE3-8DE5-F98511BA27F7}" type="datetimeFigureOut">
               <a:rPr lang="ar-EG" smtClean="0"/>
-              <a:t>28/02/1446</a:t>
+              <a:t>21/01/1447</a:t>
             </a:fld>
             <a:endParaRPr lang="ar-EG"/>
           </a:p>
@@ -1426,13 +1253,7 @@
       </p:sp>
       <p:sp>
         <p:nvSpPr>
-          <p:cNvPr id="6" name="Footer Placeholder 5">
-            <a:extLst>
-              <a:ext uri="{FF2B5EF4-FFF2-40B4-BE49-F238E27FC236}">
-                <a16:creationId xmlns:a16="http://schemas.microsoft.com/office/drawing/2014/main" id="{D48B676F-0972-4AAB-8423-31C678D34B97}"/>
-              </a:ext>
-            </a:extLst>
-          </p:cNvPr>
+          <p:cNvPr id="6" name="Footer Placeholder 5"/>
           <p:cNvSpPr>
             <a:spLocks noGrp="1"/>
           </p:cNvSpPr>
@@ -1451,13 +1272,7 @@
       </p:sp>
       <p:sp>
         <p:nvSpPr>
-          <p:cNvPr id="7" name="Slide Number Placeholder 6">
-            <a:extLst>
-              <a:ext uri="{FF2B5EF4-FFF2-40B4-BE49-F238E27FC236}">
-                <a16:creationId xmlns:a16="http://schemas.microsoft.com/office/drawing/2014/main" id="{14883297-D839-4CB2-8589-EB232376B5E3}"/>
-              </a:ext>
-            </a:extLst>
-          </p:cNvPr>
+          <p:cNvPr id="7" name="Slide Number Placeholder 6"/>
           <p:cNvSpPr>
             <a:spLocks noGrp="1"/>
           </p:cNvSpPr>
@@ -1481,7 +1296,7 @@
     </p:spTree>
     <p:extLst>
       <p:ext uri="{BB962C8B-B14F-4D97-AF65-F5344CB8AC3E}">
-        <p14:creationId xmlns:p14="http://schemas.microsoft.com/office/powerpoint/2010/main" val="1579293581"/>
+        <p14:creationId xmlns:p14="http://schemas.microsoft.com/office/powerpoint/2010/main" val="2837240278"/>
       </p:ext>
     </p:extLst>
   </p:cSld>
@@ -1510,13 +1325,7 @@
       </p:grpSpPr>
       <p:sp>
         <p:nvSpPr>
-          <p:cNvPr id="2" name="Title 1">
-            <a:extLst>
-              <a:ext uri="{FF2B5EF4-FFF2-40B4-BE49-F238E27FC236}">
-                <a16:creationId xmlns:a16="http://schemas.microsoft.com/office/drawing/2014/main" id="{6262F3CA-6091-4B50-909A-CDC5A1E934B2}"/>
-              </a:ext>
-            </a:extLst>
-          </p:cNvPr>
+          <p:cNvPr id="2" name="Title 1"/>
           <p:cNvSpPr>
             <a:spLocks noGrp="1"/>
           </p:cNvSpPr>
@@ -1526,8 +1335,8 @@
         </p:nvSpPr>
         <p:spPr>
           <a:xfrm>
-            <a:off x="839788" y="365125"/>
-            <a:ext cx="10515600" cy="1325563"/>
+            <a:off x="1385650" y="584201"/>
+            <a:ext cx="17350740" cy="2120901"/>
           </a:xfrm>
         </p:spPr>
         <p:txBody>
@@ -1538,19 +1347,13 @@
               <a:rPr lang="en-US"/>
               <a:t>Click to edit Master title style</a:t>
             </a:r>
-            <a:endParaRPr lang="ar-EG"/>
-          </a:p>
-        </p:txBody>
-      </p:sp>
-      <p:sp>
-        <p:nvSpPr>
-          <p:cNvPr id="3" name="Text Placeholder 2">
-            <a:extLst>
-              <a:ext uri="{FF2B5EF4-FFF2-40B4-BE49-F238E27FC236}">
-                <a16:creationId xmlns:a16="http://schemas.microsoft.com/office/drawing/2014/main" id="{B8C6DE04-E348-46BD-BDB3-282AC2A80E13}"/>
-              </a:ext>
-            </a:extLst>
-          </p:cNvPr>
+            <a:endParaRPr lang="en-US" dirty="0"/>
+          </a:p>
+        </p:txBody>
+      </p:sp>
+      <p:sp>
+        <p:nvSpPr>
+          <p:cNvPr id="3" name="Text Placeholder 2"/>
           <p:cNvSpPr>
             <a:spLocks noGrp="1"/>
           </p:cNvSpPr>
@@ -1560,8 +1363,8 @@
         </p:nvSpPr>
         <p:spPr>
           <a:xfrm>
-            <a:off x="839788" y="1681163"/>
-            <a:ext cx="5157787" cy="823912"/>
+            <a:off x="1385651" y="2689861"/>
+            <a:ext cx="8510349" cy="1318259"/>
           </a:xfrm>
         </p:spPr>
         <p:txBody>
@@ -1569,39 +1372,39 @@
           <a:lstStyle>
             <a:lvl1pPr marL="0" indent="0">
               <a:buNone/>
-              <a:defRPr sz="2400" b="1"/>
+              <a:defRPr sz="3840" b="1"/>
             </a:lvl1pPr>
-            <a:lvl2pPr marL="457200" indent="0">
-              <a:buNone/>
-              <a:defRPr sz="2000" b="1"/>
+            <a:lvl2pPr marL="731520" indent="0">
+              <a:buNone/>
+              <a:defRPr sz="3200" b="1"/>
             </a:lvl2pPr>
-            <a:lvl3pPr marL="914400" indent="0">
-              <a:buNone/>
-              <a:defRPr sz="1800" b="1"/>
+            <a:lvl3pPr marL="1463040" indent="0">
+              <a:buNone/>
+              <a:defRPr sz="2880" b="1"/>
             </a:lvl3pPr>
-            <a:lvl4pPr marL="1371600" indent="0">
-              <a:buNone/>
-              <a:defRPr sz="1600" b="1"/>
+            <a:lvl4pPr marL="2194560" indent="0">
+              <a:buNone/>
+              <a:defRPr sz="2560" b="1"/>
             </a:lvl4pPr>
-            <a:lvl5pPr marL="1828800" indent="0">
-              <a:buNone/>
-              <a:defRPr sz="1600" b="1"/>
+            <a:lvl5pPr marL="2926080" indent="0">
+              <a:buNone/>
+              <a:defRPr sz="2560" b="1"/>
             </a:lvl5pPr>
-            <a:lvl6pPr marL="2286000" indent="0">
-              <a:buNone/>
-              <a:defRPr sz="1600" b="1"/>
+            <a:lvl6pPr marL="3657600" indent="0">
+              <a:buNone/>
+              <a:defRPr sz="2560" b="1"/>
             </a:lvl6pPr>
-            <a:lvl7pPr marL="2743200" indent="0">
-              <a:buNone/>
-              <a:defRPr sz="1600" b="1"/>
+            <a:lvl7pPr marL="4389120" indent="0">
+              <a:buNone/>
+              <a:defRPr sz="2560" b="1"/>
             </a:lvl7pPr>
-            <a:lvl8pPr marL="3200400" indent="0">
-              <a:buNone/>
-              <a:defRPr sz="1600" b="1"/>
+            <a:lvl8pPr marL="5120640" indent="0">
+              <a:buNone/>
+              <a:defRPr sz="2560" b="1"/>
             </a:lvl8pPr>
-            <a:lvl9pPr marL="3657600" indent="0">
-              <a:buNone/>
-              <a:defRPr sz="1600" b="1"/>
+            <a:lvl9pPr marL="5852160" indent="0">
+              <a:buNone/>
+              <a:defRPr sz="2560" b="1"/>
             </a:lvl9pPr>
           </a:lstStyle>
           <a:p>
@@ -1615,13 +1418,7 @@
       </p:sp>
       <p:sp>
         <p:nvSpPr>
-          <p:cNvPr id="4" name="Content Placeholder 3">
-            <a:extLst>
-              <a:ext uri="{FF2B5EF4-FFF2-40B4-BE49-F238E27FC236}">
-                <a16:creationId xmlns:a16="http://schemas.microsoft.com/office/drawing/2014/main" id="{64A54ADE-06E9-467F-8846-6B6826827812}"/>
-              </a:ext>
-            </a:extLst>
-          </p:cNvPr>
+          <p:cNvPr id="4" name="Content Placeholder 3"/>
           <p:cNvSpPr>
             <a:spLocks noGrp="1"/>
           </p:cNvSpPr>
@@ -1631,8 +1428,8 @@
         </p:nvSpPr>
         <p:spPr>
           <a:xfrm>
-            <a:off x="839788" y="2505075"/>
-            <a:ext cx="5157787" cy="3684588"/>
+            <a:off x="1385651" y="4008120"/>
+            <a:ext cx="8510349" cy="5895341"/>
           </a:xfrm>
         </p:spPr>
         <p:txBody>
@@ -1672,19 +1469,13 @@
               <a:rPr lang="en-US"/>
               <a:t>Fifth level</a:t>
             </a:r>
-            <a:endParaRPr lang="ar-EG"/>
-          </a:p>
-        </p:txBody>
-      </p:sp>
-      <p:sp>
-        <p:nvSpPr>
-          <p:cNvPr id="5" name="Text Placeholder 4">
-            <a:extLst>
-              <a:ext uri="{FF2B5EF4-FFF2-40B4-BE49-F238E27FC236}">
-                <a16:creationId xmlns:a16="http://schemas.microsoft.com/office/drawing/2014/main" id="{5131EDFE-1B4B-44B3-8085-81DF4EC1649E}"/>
-              </a:ext>
-            </a:extLst>
-          </p:cNvPr>
+            <a:endParaRPr lang="en-US" dirty="0"/>
+          </a:p>
+        </p:txBody>
+      </p:sp>
+      <p:sp>
+        <p:nvSpPr>
+          <p:cNvPr id="5" name="Text Placeholder 4"/>
           <p:cNvSpPr>
             <a:spLocks noGrp="1"/>
           </p:cNvSpPr>
@@ -1694,8 +1485,8 @@
         </p:nvSpPr>
         <p:spPr>
           <a:xfrm>
-            <a:off x="6172200" y="1681163"/>
-            <a:ext cx="5183188" cy="823912"/>
+            <a:off x="10184130" y="2689861"/>
+            <a:ext cx="8552260" cy="1318259"/>
           </a:xfrm>
         </p:spPr>
         <p:txBody>
@@ -1703,39 +1494,39 @@
           <a:lstStyle>
             <a:lvl1pPr marL="0" indent="0">
               <a:buNone/>
-              <a:defRPr sz="2400" b="1"/>
+              <a:defRPr sz="3840" b="1"/>
             </a:lvl1pPr>
-            <a:lvl2pPr marL="457200" indent="0">
-              <a:buNone/>
-              <a:defRPr sz="2000" b="1"/>
+            <a:lvl2pPr marL="731520" indent="0">
+              <a:buNone/>
+              <a:defRPr sz="3200" b="1"/>
             </a:lvl2pPr>
-            <a:lvl3pPr marL="914400" indent="0">
-              <a:buNone/>
-              <a:defRPr sz="1800" b="1"/>
+            <a:lvl3pPr marL="1463040" indent="0">
+              <a:buNone/>
+              <a:defRPr sz="2880" b="1"/>
             </a:lvl3pPr>
-            <a:lvl4pPr marL="1371600" indent="0">
-              <a:buNone/>
-              <a:defRPr sz="1600" b="1"/>
+            <a:lvl4pPr marL="2194560" indent="0">
+              <a:buNone/>
+              <a:defRPr sz="2560" b="1"/>
             </a:lvl4pPr>
-            <a:lvl5pPr marL="1828800" indent="0">
-              <a:buNone/>
-              <a:defRPr sz="1600" b="1"/>
+            <a:lvl5pPr marL="2926080" indent="0">
+              <a:buNone/>
+              <a:defRPr sz="2560" b="1"/>
             </a:lvl5pPr>
-            <a:lvl6pPr marL="2286000" indent="0">
-              <a:buNone/>
-              <a:defRPr sz="1600" b="1"/>
+            <a:lvl6pPr marL="3657600" indent="0">
+              <a:buNone/>
+              <a:defRPr sz="2560" b="1"/>
             </a:lvl6pPr>
-            <a:lvl7pPr marL="2743200" indent="0">
-              <a:buNone/>
-              <a:defRPr sz="1600" b="1"/>
+            <a:lvl7pPr marL="4389120" indent="0">
+              <a:buNone/>
+              <a:defRPr sz="2560" b="1"/>
             </a:lvl7pPr>
-            <a:lvl8pPr marL="3200400" indent="0">
-              <a:buNone/>
-              <a:defRPr sz="1600" b="1"/>
+            <a:lvl8pPr marL="5120640" indent="0">
+              <a:buNone/>
+              <a:defRPr sz="2560" b="1"/>
             </a:lvl8pPr>
-            <a:lvl9pPr marL="3657600" indent="0">
-              <a:buNone/>
-              <a:defRPr sz="1600" b="1"/>
+            <a:lvl9pPr marL="5852160" indent="0">
+              <a:buNone/>
+              <a:defRPr sz="2560" b="1"/>
             </a:lvl9pPr>
           </a:lstStyle>
           <a:p>
@@ -1749,13 +1540,7 @@
       </p:sp>
       <p:sp>
         <p:nvSpPr>
-          <p:cNvPr id="6" name="Content Placeholder 5">
-            <a:extLst>
-              <a:ext uri="{FF2B5EF4-FFF2-40B4-BE49-F238E27FC236}">
-                <a16:creationId xmlns:a16="http://schemas.microsoft.com/office/drawing/2014/main" id="{C0B64852-7D96-4551-AAF4-BA4B65FF20C0}"/>
-              </a:ext>
-            </a:extLst>
-          </p:cNvPr>
+          <p:cNvPr id="6" name="Content Placeholder 5"/>
           <p:cNvSpPr>
             <a:spLocks noGrp="1"/>
           </p:cNvSpPr>
@@ -1765,8 +1550,8 @@
         </p:nvSpPr>
         <p:spPr>
           <a:xfrm>
-            <a:off x="6172200" y="2505075"/>
-            <a:ext cx="5183188" cy="3684588"/>
+            <a:off x="10184130" y="4008120"/>
+            <a:ext cx="8552260" cy="5895341"/>
           </a:xfrm>
         </p:spPr>
         <p:txBody>
@@ -1806,19 +1591,13 @@
               <a:rPr lang="en-US"/>
               <a:t>Fifth level</a:t>
             </a:r>
-            <a:endParaRPr lang="ar-EG"/>
-          </a:p>
-        </p:txBody>
-      </p:sp>
-      <p:sp>
-        <p:nvSpPr>
-          <p:cNvPr id="7" name="Date Placeholder 6">
-            <a:extLst>
-              <a:ext uri="{FF2B5EF4-FFF2-40B4-BE49-F238E27FC236}">
-                <a16:creationId xmlns:a16="http://schemas.microsoft.com/office/drawing/2014/main" id="{51E06172-27FC-42CE-9140-EEAA6F69CF13}"/>
-              </a:ext>
-            </a:extLst>
-          </p:cNvPr>
+            <a:endParaRPr lang="en-US" dirty="0"/>
+          </a:p>
+        </p:txBody>
+      </p:sp>
+      <p:sp>
+        <p:nvSpPr>
+          <p:cNvPr id="7" name="Date Placeholder 6"/>
           <p:cNvSpPr>
             <a:spLocks noGrp="1"/>
           </p:cNvSpPr>
@@ -1833,7 +1612,7 @@
           <a:p>
             <a:fld id="{E73D85F0-5B66-4BE3-8DE5-F98511BA27F7}" type="datetimeFigureOut">
               <a:rPr lang="ar-EG" smtClean="0"/>
-              <a:t>28/02/1446</a:t>
+              <a:t>21/01/1447</a:t>
             </a:fld>
             <a:endParaRPr lang="ar-EG"/>
           </a:p>
@@ -1841,13 +1620,7 @@
       </p:sp>
       <p:sp>
         <p:nvSpPr>
-          <p:cNvPr id="8" name="Footer Placeholder 7">
-            <a:extLst>
-              <a:ext uri="{FF2B5EF4-FFF2-40B4-BE49-F238E27FC236}">
-                <a16:creationId xmlns:a16="http://schemas.microsoft.com/office/drawing/2014/main" id="{0AD68B9D-C5AA-4B0A-8EEA-9B6B5E7158C6}"/>
-              </a:ext>
-            </a:extLst>
-          </p:cNvPr>
+          <p:cNvPr id="8" name="Footer Placeholder 7"/>
           <p:cNvSpPr>
             <a:spLocks noGrp="1"/>
           </p:cNvSpPr>
@@ -1866,13 +1639,7 @@
       </p:sp>
       <p:sp>
         <p:nvSpPr>
-          <p:cNvPr id="9" name="Slide Number Placeholder 8">
-            <a:extLst>
-              <a:ext uri="{FF2B5EF4-FFF2-40B4-BE49-F238E27FC236}">
-                <a16:creationId xmlns:a16="http://schemas.microsoft.com/office/drawing/2014/main" id="{DDF4D715-07CA-4B2A-9692-7DFAACE201AB}"/>
-              </a:ext>
-            </a:extLst>
-          </p:cNvPr>
+          <p:cNvPr id="9" name="Slide Number Placeholder 8"/>
           <p:cNvSpPr>
             <a:spLocks noGrp="1"/>
           </p:cNvSpPr>
@@ -1896,7 +1663,7 @@
     </p:spTree>
     <p:extLst>
       <p:ext uri="{BB962C8B-B14F-4D97-AF65-F5344CB8AC3E}">
-        <p14:creationId xmlns:p14="http://schemas.microsoft.com/office/powerpoint/2010/main" val="568761924"/>
+        <p14:creationId xmlns:p14="http://schemas.microsoft.com/office/powerpoint/2010/main" val="1120529801"/>
       </p:ext>
     </p:extLst>
   </p:cSld>
@@ -1925,13 +1692,7 @@
       </p:grpSpPr>
       <p:sp>
         <p:nvSpPr>
-          <p:cNvPr id="2" name="Title 1">
-            <a:extLst>
-              <a:ext uri="{FF2B5EF4-FFF2-40B4-BE49-F238E27FC236}">
-                <a16:creationId xmlns:a16="http://schemas.microsoft.com/office/drawing/2014/main" id="{C6B29F0B-A7E2-4FD8-9033-4D31173C2B10}"/>
-              </a:ext>
-            </a:extLst>
-          </p:cNvPr>
+          <p:cNvPr id="2" name="Title 1"/>
           <p:cNvSpPr>
             <a:spLocks noGrp="1"/>
           </p:cNvSpPr>
@@ -1948,19 +1709,13 @@
               <a:rPr lang="en-US"/>
               <a:t>Click to edit Master title style</a:t>
             </a:r>
-            <a:endParaRPr lang="ar-EG"/>
-          </a:p>
-        </p:txBody>
-      </p:sp>
-      <p:sp>
-        <p:nvSpPr>
-          <p:cNvPr id="3" name="Date Placeholder 2">
-            <a:extLst>
-              <a:ext uri="{FF2B5EF4-FFF2-40B4-BE49-F238E27FC236}">
-                <a16:creationId xmlns:a16="http://schemas.microsoft.com/office/drawing/2014/main" id="{BC82F60C-E830-4EBA-A5FB-6D6381B24AFE}"/>
-              </a:ext>
-            </a:extLst>
-          </p:cNvPr>
+            <a:endParaRPr lang="en-US" dirty="0"/>
+          </a:p>
+        </p:txBody>
+      </p:sp>
+      <p:sp>
+        <p:nvSpPr>
+          <p:cNvPr id="3" name="Date Placeholder 2"/>
           <p:cNvSpPr>
             <a:spLocks noGrp="1"/>
           </p:cNvSpPr>
@@ -1975,7 +1730,7 @@
           <a:p>
             <a:fld id="{E73D85F0-5B66-4BE3-8DE5-F98511BA27F7}" type="datetimeFigureOut">
               <a:rPr lang="ar-EG" smtClean="0"/>
-              <a:t>28/02/1446</a:t>
+              <a:t>21/01/1447</a:t>
             </a:fld>
             <a:endParaRPr lang="ar-EG"/>
           </a:p>
@@ -1983,13 +1738,7 @@
       </p:sp>
       <p:sp>
         <p:nvSpPr>
-          <p:cNvPr id="4" name="Footer Placeholder 3">
-            <a:extLst>
-              <a:ext uri="{FF2B5EF4-FFF2-40B4-BE49-F238E27FC236}">
-                <a16:creationId xmlns:a16="http://schemas.microsoft.com/office/drawing/2014/main" id="{221ECC53-F3D5-476D-8D02-7FD579484200}"/>
-              </a:ext>
-            </a:extLst>
-          </p:cNvPr>
+          <p:cNvPr id="4" name="Footer Placeholder 3"/>
           <p:cNvSpPr>
             <a:spLocks noGrp="1"/>
           </p:cNvSpPr>
@@ -2008,13 +1757,7 @@
       </p:sp>
       <p:sp>
         <p:nvSpPr>
-          <p:cNvPr id="5" name="Slide Number Placeholder 4">
-            <a:extLst>
-              <a:ext uri="{FF2B5EF4-FFF2-40B4-BE49-F238E27FC236}">
-                <a16:creationId xmlns:a16="http://schemas.microsoft.com/office/drawing/2014/main" id="{58F99619-578D-45F8-B663-8ED5596068F2}"/>
-              </a:ext>
-            </a:extLst>
-          </p:cNvPr>
+          <p:cNvPr id="5" name="Slide Number Placeholder 4"/>
           <p:cNvSpPr>
             <a:spLocks noGrp="1"/>
           </p:cNvSpPr>
@@ -2038,7 +1781,7 @@
     </p:spTree>
     <p:extLst>
       <p:ext uri="{BB962C8B-B14F-4D97-AF65-F5344CB8AC3E}">
-        <p14:creationId xmlns:p14="http://schemas.microsoft.com/office/powerpoint/2010/main" val="3447044242"/>
+        <p14:creationId xmlns:p14="http://schemas.microsoft.com/office/powerpoint/2010/main" val="2097818326"/>
       </p:ext>
     </p:extLst>
   </p:cSld>
@@ -2067,13 +1810,7 @@
       </p:grpSpPr>
       <p:sp>
         <p:nvSpPr>
-          <p:cNvPr id="2" name="Date Placeholder 1">
-            <a:extLst>
-              <a:ext uri="{FF2B5EF4-FFF2-40B4-BE49-F238E27FC236}">
-                <a16:creationId xmlns:a16="http://schemas.microsoft.com/office/drawing/2014/main" id="{7D23AD99-CDF6-4811-A71D-443F0502D92D}"/>
-              </a:ext>
-            </a:extLst>
-          </p:cNvPr>
+          <p:cNvPr id="2" name="Date Placeholder 1"/>
           <p:cNvSpPr>
             <a:spLocks noGrp="1"/>
           </p:cNvSpPr>
@@ -2088,7 +1825,7 @@
           <a:p>
             <a:fld id="{E73D85F0-5B66-4BE3-8DE5-F98511BA27F7}" type="datetimeFigureOut">
               <a:rPr lang="ar-EG" smtClean="0"/>
-              <a:t>28/02/1446</a:t>
+              <a:t>21/01/1447</a:t>
             </a:fld>
             <a:endParaRPr lang="ar-EG"/>
           </a:p>
@@ -2096,13 +1833,7 @@
       </p:sp>
       <p:sp>
         <p:nvSpPr>
-          <p:cNvPr id="3" name="Footer Placeholder 2">
-            <a:extLst>
-              <a:ext uri="{FF2B5EF4-FFF2-40B4-BE49-F238E27FC236}">
-                <a16:creationId xmlns:a16="http://schemas.microsoft.com/office/drawing/2014/main" id="{BCCACA18-F1D1-4277-88C1-DD9AED80A0E5}"/>
-              </a:ext>
-            </a:extLst>
-          </p:cNvPr>
+          <p:cNvPr id="3" name="Footer Placeholder 2"/>
           <p:cNvSpPr>
             <a:spLocks noGrp="1"/>
           </p:cNvSpPr>
@@ -2121,13 +1852,7 @@
       </p:sp>
       <p:sp>
         <p:nvSpPr>
-          <p:cNvPr id="4" name="Slide Number Placeholder 3">
-            <a:extLst>
-              <a:ext uri="{FF2B5EF4-FFF2-40B4-BE49-F238E27FC236}">
-                <a16:creationId xmlns:a16="http://schemas.microsoft.com/office/drawing/2014/main" id="{A4F5E804-08F2-453D-B17E-FBFDA826C774}"/>
-              </a:ext>
-            </a:extLst>
-          </p:cNvPr>
+          <p:cNvPr id="4" name="Slide Number Placeholder 3"/>
           <p:cNvSpPr>
             <a:spLocks noGrp="1"/>
           </p:cNvSpPr>
@@ -2151,7 +1876,7 @@
     </p:spTree>
     <p:extLst>
       <p:ext uri="{BB962C8B-B14F-4D97-AF65-F5344CB8AC3E}">
-        <p14:creationId xmlns:p14="http://schemas.microsoft.com/office/powerpoint/2010/main" val="3909833685"/>
+        <p14:creationId xmlns:p14="http://schemas.microsoft.com/office/powerpoint/2010/main" val="4227355388"/>
       </p:ext>
     </p:extLst>
   </p:cSld>
@@ -2180,13 +1905,7 @@
       </p:grpSpPr>
       <p:sp>
         <p:nvSpPr>
-          <p:cNvPr id="2" name="Title 1">
-            <a:extLst>
-              <a:ext uri="{FF2B5EF4-FFF2-40B4-BE49-F238E27FC236}">
-                <a16:creationId xmlns:a16="http://schemas.microsoft.com/office/drawing/2014/main" id="{72B6F3E3-8EF6-47C1-9BD2-F335CEAD7EB3}"/>
-              </a:ext>
-            </a:extLst>
-          </p:cNvPr>
+          <p:cNvPr id="2" name="Title 1"/>
           <p:cNvSpPr>
             <a:spLocks noGrp="1"/>
           </p:cNvSpPr>
@@ -2196,15 +1915,15 @@
         </p:nvSpPr>
         <p:spPr>
           <a:xfrm>
-            <a:off x="839788" y="457200"/>
-            <a:ext cx="3932237" cy="1600200"/>
+            <a:off x="1385651" y="731520"/>
+            <a:ext cx="6488191" cy="2560320"/>
           </a:xfrm>
         </p:spPr>
         <p:txBody>
           <a:bodyPr anchor="b"/>
           <a:lstStyle>
             <a:lvl1pPr>
-              <a:defRPr sz="3200"/>
+              <a:defRPr sz="5120"/>
             </a:lvl1pPr>
           </a:lstStyle>
           <a:p>
@@ -2212,19 +1931,13 @@
               <a:rPr lang="en-US"/>
               <a:t>Click to edit Master title style</a:t>
             </a:r>
-            <a:endParaRPr lang="ar-EG"/>
-          </a:p>
-        </p:txBody>
-      </p:sp>
-      <p:sp>
-        <p:nvSpPr>
-          <p:cNvPr id="3" name="Content Placeholder 2">
-            <a:extLst>
-              <a:ext uri="{FF2B5EF4-FFF2-40B4-BE49-F238E27FC236}">
-                <a16:creationId xmlns:a16="http://schemas.microsoft.com/office/drawing/2014/main" id="{61ECF231-AB10-455E-A65F-0EA72FD50AE1}"/>
-              </a:ext>
-            </a:extLst>
-          </p:cNvPr>
+            <a:endParaRPr lang="en-US" dirty="0"/>
+          </a:p>
+        </p:txBody>
+      </p:sp>
+      <p:sp>
+        <p:nvSpPr>
+          <p:cNvPr id="3" name="Content Placeholder 2"/>
           <p:cNvSpPr>
             <a:spLocks noGrp="1"/>
           </p:cNvSpPr>
@@ -2234,39 +1947,39 @@
         </p:nvSpPr>
         <p:spPr>
           <a:xfrm>
-            <a:off x="5183188" y="987425"/>
-            <a:ext cx="6172200" cy="4873625"/>
+            <a:off x="8552260" y="1579881"/>
+            <a:ext cx="10184130" cy="7797800"/>
           </a:xfrm>
         </p:spPr>
         <p:txBody>
           <a:bodyPr/>
           <a:lstStyle>
             <a:lvl1pPr>
-              <a:defRPr sz="3200"/>
+              <a:defRPr sz="5120"/>
             </a:lvl1pPr>
             <a:lvl2pPr>
-              <a:defRPr sz="2800"/>
+              <a:defRPr sz="4480"/>
             </a:lvl2pPr>
             <a:lvl3pPr>
-              <a:defRPr sz="2400"/>
+              <a:defRPr sz="3840"/>
             </a:lvl3pPr>
             <a:lvl4pPr>
-              <a:defRPr sz="2000"/>
+              <a:defRPr sz="3200"/>
             </a:lvl4pPr>
             <a:lvl5pPr>
-              <a:defRPr sz="2000"/>
+              <a:defRPr sz="3200"/>
             </a:lvl5pPr>
             <a:lvl6pPr>
-              <a:defRPr sz="2000"/>
+              <a:defRPr sz="3200"/>
             </a:lvl6pPr>
             <a:lvl7pPr>
-              <a:defRPr sz="2000"/>
+              <a:defRPr sz="3200"/>
             </a:lvl7pPr>
             <a:lvl8pPr>
-              <a:defRPr sz="2000"/>
+              <a:defRPr sz="3200"/>
             </a:lvl8pPr>
             <a:lvl9pPr>
-              <a:defRPr sz="2000"/>
+              <a:defRPr sz="3200"/>
             </a:lvl9pPr>
           </a:lstStyle>
           <a:p>
@@ -2303,19 +2016,13 @@
               <a:rPr lang="en-US"/>
               <a:t>Fifth level</a:t>
             </a:r>
-            <a:endParaRPr lang="ar-EG"/>
-          </a:p>
-        </p:txBody>
-      </p:sp>
-      <p:sp>
-        <p:nvSpPr>
-          <p:cNvPr id="4" name="Text Placeholder 3">
-            <a:extLst>
-              <a:ext uri="{FF2B5EF4-FFF2-40B4-BE49-F238E27FC236}">
-                <a16:creationId xmlns:a16="http://schemas.microsoft.com/office/drawing/2014/main" id="{B1EEFAD1-9B8C-4047-86E9-EB79A77AD50F}"/>
-              </a:ext>
-            </a:extLst>
-          </p:cNvPr>
+            <a:endParaRPr lang="en-US" dirty="0"/>
+          </a:p>
+        </p:txBody>
+      </p:sp>
+      <p:sp>
+        <p:nvSpPr>
+          <p:cNvPr id="4" name="Text Placeholder 3"/>
           <p:cNvSpPr>
             <a:spLocks noGrp="1"/>
           </p:cNvSpPr>
@@ -2325,8 +2032,8 @@
         </p:nvSpPr>
         <p:spPr>
           <a:xfrm>
-            <a:off x="839788" y="2057400"/>
-            <a:ext cx="3932237" cy="3811588"/>
+            <a:off x="1385651" y="3291840"/>
+            <a:ext cx="6488191" cy="6098541"/>
           </a:xfrm>
         </p:spPr>
         <p:txBody>
@@ -2334,39 +2041,39 @@
           <a:lstStyle>
             <a:lvl1pPr marL="0" indent="0">
               <a:buNone/>
+              <a:defRPr sz="2560"/>
+            </a:lvl1pPr>
+            <a:lvl2pPr marL="731520" indent="0">
+              <a:buNone/>
+              <a:defRPr sz="2240"/>
+            </a:lvl2pPr>
+            <a:lvl3pPr marL="1463040" indent="0">
+              <a:buNone/>
+              <a:defRPr sz="1920"/>
+            </a:lvl3pPr>
+            <a:lvl4pPr marL="2194560" indent="0">
+              <a:buNone/>
               <a:defRPr sz="1600"/>
-            </a:lvl1pPr>
-            <a:lvl2pPr marL="457200" indent="0">
-              <a:buNone/>
-              <a:defRPr sz="1400"/>
-            </a:lvl2pPr>
-            <a:lvl3pPr marL="914400" indent="0">
-              <a:buNone/>
-              <a:defRPr sz="1200"/>
-            </a:lvl3pPr>
-            <a:lvl4pPr marL="1371600" indent="0">
-              <a:buNone/>
-              <a:defRPr sz="1000"/>
             </a:lvl4pPr>
-            <a:lvl5pPr marL="1828800" indent="0">
-              <a:buNone/>
-              <a:defRPr sz="1000"/>
+            <a:lvl5pPr marL="2926080" indent="0">
+              <a:buNone/>
+              <a:defRPr sz="1600"/>
             </a:lvl5pPr>
-            <a:lvl6pPr marL="2286000" indent="0">
-              <a:buNone/>
-              <a:defRPr sz="1000"/>
+            <a:lvl6pPr marL="3657600" indent="0">
+              <a:buNone/>
+              <a:defRPr sz="1600"/>
             </a:lvl6pPr>
-            <a:lvl7pPr marL="2743200" indent="0">
-              <a:buNone/>
-              <a:defRPr sz="1000"/>
+            <a:lvl7pPr marL="4389120" indent="0">
+              <a:buNone/>
+              <a:defRPr sz="1600"/>
             </a:lvl7pPr>
-            <a:lvl8pPr marL="3200400" indent="0">
-              <a:buNone/>
-              <a:defRPr sz="1000"/>
+            <a:lvl8pPr marL="5120640" indent="0">
+              <a:buNone/>
+              <a:defRPr sz="1600"/>
             </a:lvl8pPr>
-            <a:lvl9pPr marL="3657600" indent="0">
-              <a:buNone/>
-              <a:defRPr sz="1000"/>
+            <a:lvl9pPr marL="5852160" indent="0">
+              <a:buNone/>
+              <a:defRPr sz="1600"/>
             </a:lvl9pPr>
           </a:lstStyle>
           <a:p>
@@ -2380,13 +2087,7 @@
       </p:sp>
       <p:sp>
         <p:nvSpPr>
-          <p:cNvPr id="5" name="Date Placeholder 4">
-            <a:extLst>
-              <a:ext uri="{FF2B5EF4-FFF2-40B4-BE49-F238E27FC236}">
-                <a16:creationId xmlns:a16="http://schemas.microsoft.com/office/drawing/2014/main" id="{C26AA817-63CE-4D22-97B2-6CEBD9574E24}"/>
-              </a:ext>
-            </a:extLst>
-          </p:cNvPr>
+          <p:cNvPr id="5" name="Date Placeholder 4"/>
           <p:cNvSpPr>
             <a:spLocks noGrp="1"/>
           </p:cNvSpPr>
@@ -2401,7 +2102,7 @@
           <a:p>
             <a:fld id="{E73D85F0-5B66-4BE3-8DE5-F98511BA27F7}" type="datetimeFigureOut">
               <a:rPr lang="ar-EG" smtClean="0"/>
-              <a:t>28/02/1446</a:t>
+              <a:t>21/01/1447</a:t>
             </a:fld>
             <a:endParaRPr lang="ar-EG"/>
           </a:p>
@@ -2409,13 +2110,7 @@
       </p:sp>
       <p:sp>
         <p:nvSpPr>
-          <p:cNvPr id="6" name="Footer Placeholder 5">
-            <a:extLst>
-              <a:ext uri="{FF2B5EF4-FFF2-40B4-BE49-F238E27FC236}">
-                <a16:creationId xmlns:a16="http://schemas.microsoft.com/office/drawing/2014/main" id="{E737F34F-1787-46A2-B926-AA39753ECA7E}"/>
-              </a:ext>
-            </a:extLst>
-          </p:cNvPr>
+          <p:cNvPr id="6" name="Footer Placeholder 5"/>
           <p:cNvSpPr>
             <a:spLocks noGrp="1"/>
           </p:cNvSpPr>
@@ -2434,13 +2129,7 @@
       </p:sp>
       <p:sp>
         <p:nvSpPr>
-          <p:cNvPr id="7" name="Slide Number Placeholder 6">
-            <a:extLst>
-              <a:ext uri="{FF2B5EF4-FFF2-40B4-BE49-F238E27FC236}">
-                <a16:creationId xmlns:a16="http://schemas.microsoft.com/office/drawing/2014/main" id="{6390CC34-B4F5-40F3-82CA-A1DF3702974B}"/>
-              </a:ext>
-            </a:extLst>
-          </p:cNvPr>
+          <p:cNvPr id="7" name="Slide Number Placeholder 6"/>
           <p:cNvSpPr>
             <a:spLocks noGrp="1"/>
           </p:cNvSpPr>
@@ -2464,7 +2153,7 @@
     </p:spTree>
     <p:extLst>
       <p:ext uri="{BB962C8B-B14F-4D97-AF65-F5344CB8AC3E}">
-        <p14:creationId xmlns:p14="http://schemas.microsoft.com/office/powerpoint/2010/main" val="659324490"/>
+        <p14:creationId xmlns:p14="http://schemas.microsoft.com/office/powerpoint/2010/main" val="1498641551"/>
       </p:ext>
     </p:extLst>
   </p:cSld>
@@ -2493,13 +2182,7 @@
       </p:grpSpPr>
       <p:sp>
         <p:nvSpPr>
-          <p:cNvPr id="2" name="Title 1">
-            <a:extLst>
-              <a:ext uri="{FF2B5EF4-FFF2-40B4-BE49-F238E27FC236}">
-                <a16:creationId xmlns:a16="http://schemas.microsoft.com/office/drawing/2014/main" id="{D5F2262D-8669-465D-B30D-45627287C9EC}"/>
-              </a:ext>
-            </a:extLst>
-          </p:cNvPr>
+          <p:cNvPr id="2" name="Title 1"/>
           <p:cNvSpPr>
             <a:spLocks noGrp="1"/>
           </p:cNvSpPr>
@@ -2509,15 +2192,15 @@
         </p:nvSpPr>
         <p:spPr>
           <a:xfrm>
-            <a:off x="839788" y="457200"/>
-            <a:ext cx="3932237" cy="1600200"/>
+            <a:off x="1385651" y="731520"/>
+            <a:ext cx="6488191" cy="2560320"/>
           </a:xfrm>
         </p:spPr>
         <p:txBody>
           <a:bodyPr anchor="b"/>
           <a:lstStyle>
             <a:lvl1pPr>
-              <a:defRPr sz="3200"/>
+              <a:defRPr sz="5120"/>
             </a:lvl1pPr>
           </a:lstStyle>
           <a:p>
@@ -2525,21 +2208,15 @@
               <a:rPr lang="en-US"/>
               <a:t>Click to edit Master title style</a:t>
             </a:r>
-            <a:endParaRPr lang="ar-EG"/>
-          </a:p>
-        </p:txBody>
-      </p:sp>
-      <p:sp>
-        <p:nvSpPr>
-          <p:cNvPr id="3" name="Picture Placeholder 2">
-            <a:extLst>
-              <a:ext uri="{FF2B5EF4-FFF2-40B4-BE49-F238E27FC236}">
-                <a16:creationId xmlns:a16="http://schemas.microsoft.com/office/drawing/2014/main" id="{4A850DD6-3210-464F-B06A-D0C63CCE2257}"/>
-              </a:ext>
-            </a:extLst>
-          </p:cNvPr>
-          <p:cNvSpPr>
-            <a:spLocks noGrp="1"/>
+            <a:endParaRPr lang="en-US" dirty="0"/>
+          </a:p>
+        </p:txBody>
+      </p:sp>
+      <p:sp>
+        <p:nvSpPr>
+          <p:cNvPr id="3" name="Picture Placeholder 2"/>
+          <p:cNvSpPr>
+            <a:spLocks noGrp="1" noChangeAspect="1"/>
           </p:cNvSpPr>
           <p:nvPr>
             <p:ph type="pic" idx="1"/>
@@ -2547,8 +2224,73 @@
         </p:nvSpPr>
         <p:spPr>
           <a:xfrm>
-            <a:off x="5183188" y="987425"/>
-            <a:ext cx="6172200" cy="4873625"/>
+            <a:off x="8552260" y="1579881"/>
+            <a:ext cx="10184130" cy="7797800"/>
+          </a:xfrm>
+        </p:spPr>
+        <p:txBody>
+          <a:bodyPr anchor="t"/>
+          <a:lstStyle>
+            <a:lvl1pPr marL="0" indent="0">
+              <a:buNone/>
+              <a:defRPr sz="5120"/>
+            </a:lvl1pPr>
+            <a:lvl2pPr marL="731520" indent="0">
+              <a:buNone/>
+              <a:defRPr sz="4480"/>
+            </a:lvl2pPr>
+            <a:lvl3pPr marL="1463040" indent="0">
+              <a:buNone/>
+              <a:defRPr sz="3840"/>
+            </a:lvl3pPr>
+            <a:lvl4pPr marL="2194560" indent="0">
+              <a:buNone/>
+              <a:defRPr sz="3200"/>
+            </a:lvl4pPr>
+            <a:lvl5pPr marL="2926080" indent="0">
+              <a:buNone/>
+              <a:defRPr sz="3200"/>
+            </a:lvl5pPr>
+            <a:lvl6pPr marL="3657600" indent="0">
+              <a:buNone/>
+              <a:defRPr sz="3200"/>
+            </a:lvl6pPr>
+            <a:lvl7pPr marL="4389120" indent="0">
+              <a:buNone/>
+              <a:defRPr sz="3200"/>
+            </a:lvl7pPr>
+            <a:lvl8pPr marL="5120640" indent="0">
+              <a:buNone/>
+              <a:defRPr sz="3200"/>
+            </a:lvl8pPr>
+            <a:lvl9pPr marL="5852160" indent="0">
+              <a:buNone/>
+              <a:defRPr sz="3200"/>
+            </a:lvl9pPr>
+          </a:lstStyle>
+          <a:p>
+            <a:r>
+              <a:rPr lang="en-US"/>
+              <a:t>Click icon to add picture</a:t>
+            </a:r>
+            <a:endParaRPr lang="en-US" dirty="0"/>
+          </a:p>
+        </p:txBody>
+      </p:sp>
+      <p:sp>
+        <p:nvSpPr>
+          <p:cNvPr id="4" name="Text Placeholder 3"/>
+          <p:cNvSpPr>
+            <a:spLocks noGrp="1"/>
+          </p:cNvSpPr>
+          <p:nvPr>
+            <p:ph type="body" sz="half" idx="2"/>
+          </p:nvPr>
+        </p:nvSpPr>
+        <p:spPr>
+          <a:xfrm>
+            <a:off x="1385651" y="3291840"/>
+            <a:ext cx="6488191" cy="6098541"/>
           </a:xfrm>
         </p:spPr>
         <p:txBody>
@@ -2556,109 +2298,42 @@
           <a:lstStyle>
             <a:lvl1pPr marL="0" indent="0">
               <a:buNone/>
-              <a:defRPr sz="3200"/>
+              <a:defRPr sz="2560"/>
             </a:lvl1pPr>
-            <a:lvl2pPr marL="457200" indent="0">
-              <a:buNone/>
-              <a:defRPr sz="2800"/>
+            <a:lvl2pPr marL="731520" indent="0">
+              <a:buNone/>
+              <a:defRPr sz="2240"/>
             </a:lvl2pPr>
-            <a:lvl3pPr marL="914400" indent="0">
-              <a:buNone/>
-              <a:defRPr sz="2400"/>
+            <a:lvl3pPr marL="1463040" indent="0">
+              <a:buNone/>
+              <a:defRPr sz="1920"/>
             </a:lvl3pPr>
-            <a:lvl4pPr marL="1371600" indent="0">
-              <a:buNone/>
-              <a:defRPr sz="2000"/>
+            <a:lvl4pPr marL="2194560" indent="0">
+              <a:buNone/>
+              <a:defRPr sz="1600"/>
             </a:lvl4pPr>
-            <a:lvl5pPr marL="1828800" indent="0">
-              <a:buNone/>
-              <a:defRPr sz="2000"/>
+            <a:lvl5pPr marL="2926080" indent="0">
+              <a:buNone/>
+              <a:defRPr sz="1600"/>
             </a:lvl5pPr>
-            <a:lvl6pPr marL="2286000" indent="0">
-              <a:buNone/>
-              <a:defRPr sz="2000"/>
+            <a:lvl6pPr marL="3657600" indent="0">
+              <a:buNone/>
+              <a:defRPr sz="1600"/>
             </a:lvl6pPr>
-            <a:lvl7pPr marL="2743200" indent="0">
-              <a:buNone/>
-              <a:defRPr sz="2000"/>
+            <a:lvl7pPr marL="4389120" indent="0">
+              <a:buNone/>
+              <a:defRPr sz="1600"/>
             </a:lvl7pPr>
-            <a:lvl8pPr marL="3200400" indent="0">
-              <a:buNone/>
-              <a:defRPr sz="2000"/>
+            <a:lvl8pPr marL="5120640" indent="0">
+              <a:buNone/>
+              <a:defRPr sz="1600"/>
             </a:lvl8pPr>
-            <a:lvl9pPr marL="3657600" indent="0">
-              <a:buNone/>
-              <a:defRPr sz="2000"/>
+            <a:lvl9pPr marL="5852160" indent="0">
+              <a:buNone/>
+              <a:defRPr sz="1600"/>
             </a:lvl9pPr>
           </a:lstStyle>
           <a:p>
-            <a:endParaRPr lang="ar-EG"/>
-          </a:p>
-        </p:txBody>
-      </p:sp>
-      <p:sp>
-        <p:nvSpPr>
-          <p:cNvPr id="4" name="Text Placeholder 3">
-            <a:extLst>
-              <a:ext uri="{FF2B5EF4-FFF2-40B4-BE49-F238E27FC236}">
-                <a16:creationId xmlns:a16="http://schemas.microsoft.com/office/drawing/2014/main" id="{45557AE0-A11F-48CA-9A0D-AC4A732D7732}"/>
-              </a:ext>
-            </a:extLst>
-          </p:cNvPr>
-          <p:cNvSpPr>
-            <a:spLocks noGrp="1"/>
-          </p:cNvSpPr>
-          <p:nvPr>
-            <p:ph type="body" sz="half" idx="2"/>
-          </p:nvPr>
-        </p:nvSpPr>
-        <p:spPr>
-          <a:xfrm>
-            <a:off x="839788" y="2057400"/>
-            <a:ext cx="3932237" cy="3811588"/>
-          </a:xfrm>
-        </p:spPr>
-        <p:txBody>
-          <a:bodyPr/>
-          <a:lstStyle>
-            <a:lvl1pPr marL="0" indent="0">
-              <a:buNone/>
-              <a:defRPr sz="1600"/>
-            </a:lvl1pPr>
-            <a:lvl2pPr marL="457200" indent="0">
-              <a:buNone/>
-              <a:defRPr sz="1400"/>
-            </a:lvl2pPr>
-            <a:lvl3pPr marL="914400" indent="0">
-              <a:buNone/>
-              <a:defRPr sz="1200"/>
-            </a:lvl3pPr>
-            <a:lvl4pPr marL="1371600" indent="0">
-              <a:buNone/>
-              <a:defRPr sz="1000"/>
-            </a:lvl4pPr>
-            <a:lvl5pPr marL="1828800" indent="0">
-              <a:buNone/>
-              <a:defRPr sz="1000"/>
-            </a:lvl5pPr>
-            <a:lvl6pPr marL="2286000" indent="0">
-              <a:buNone/>
-              <a:defRPr sz="1000"/>
-            </a:lvl6pPr>
-            <a:lvl7pPr marL="2743200" indent="0">
-              <a:buNone/>
-              <a:defRPr sz="1000"/>
-            </a:lvl7pPr>
-            <a:lvl8pPr marL="3200400" indent="0">
-              <a:buNone/>
-              <a:defRPr sz="1000"/>
-            </a:lvl8pPr>
-            <a:lvl9pPr marL="3657600" indent="0">
-              <a:buNone/>
-              <a:defRPr sz="1000"/>
-            </a:lvl9pPr>
-          </a:lstStyle>
-          <a:p>
             <a:pPr lvl="0"/>
             <a:r>
               <a:rPr lang="en-US"/>
@@ -2669,13 +2344,7 @@
       </p:sp>
       <p:sp>
         <p:nvSpPr>
-          <p:cNvPr id="5" name="Date Placeholder 4">
-            <a:extLst>
-              <a:ext uri="{FF2B5EF4-FFF2-40B4-BE49-F238E27FC236}">
-                <a16:creationId xmlns:a16="http://schemas.microsoft.com/office/drawing/2014/main" id="{296D18B6-FEB5-478F-8551-50A2855DDC26}"/>
-              </a:ext>
-            </a:extLst>
-          </p:cNvPr>
+          <p:cNvPr id="5" name="Date Placeholder 4"/>
           <p:cNvSpPr>
             <a:spLocks noGrp="1"/>
           </p:cNvSpPr>
@@ -2690,7 +2359,7 @@
           <a:p>
             <a:fld id="{E73D85F0-5B66-4BE3-8DE5-F98511BA27F7}" type="datetimeFigureOut">
               <a:rPr lang="ar-EG" smtClean="0"/>
-              <a:t>28/02/1446</a:t>
+              <a:t>21/01/1447</a:t>
             </a:fld>
             <a:endParaRPr lang="ar-EG"/>
           </a:p>
@@ -2698,13 +2367,7 @@
       </p:sp>
       <p:sp>
         <p:nvSpPr>
-          <p:cNvPr id="6" name="Footer Placeholder 5">
-            <a:extLst>
-              <a:ext uri="{FF2B5EF4-FFF2-40B4-BE49-F238E27FC236}">
-                <a16:creationId xmlns:a16="http://schemas.microsoft.com/office/drawing/2014/main" id="{1AB85F8C-9955-422C-9C3F-6E35164C4701}"/>
-              </a:ext>
-            </a:extLst>
-          </p:cNvPr>
+          <p:cNvPr id="6" name="Footer Placeholder 5"/>
           <p:cNvSpPr>
             <a:spLocks noGrp="1"/>
           </p:cNvSpPr>
@@ -2723,13 +2386,7 @@
       </p:sp>
       <p:sp>
         <p:nvSpPr>
-          <p:cNvPr id="7" name="Slide Number Placeholder 6">
-            <a:extLst>
-              <a:ext uri="{FF2B5EF4-FFF2-40B4-BE49-F238E27FC236}">
-                <a16:creationId xmlns:a16="http://schemas.microsoft.com/office/drawing/2014/main" id="{BF488527-540A-4D7C-9294-196022FA1745}"/>
-              </a:ext>
-            </a:extLst>
-          </p:cNvPr>
+          <p:cNvPr id="7" name="Slide Number Placeholder 6"/>
           <p:cNvSpPr>
             <a:spLocks noGrp="1"/>
           </p:cNvSpPr>
@@ -2753,7 +2410,7 @@
     </p:spTree>
     <p:extLst>
       <p:ext uri="{BB962C8B-B14F-4D97-AF65-F5344CB8AC3E}">
-        <p14:creationId xmlns:p14="http://schemas.microsoft.com/office/powerpoint/2010/main" val="2592489448"/>
+        <p14:creationId xmlns:p14="http://schemas.microsoft.com/office/powerpoint/2010/main" val="2845531301"/>
       </p:ext>
     </p:extLst>
   </p:cSld>
@@ -2787,13 +2444,7 @@
       </p:grpSpPr>
       <p:sp>
         <p:nvSpPr>
-          <p:cNvPr id="2" name="Title Placeholder 1">
-            <a:extLst>
-              <a:ext uri="{FF2B5EF4-FFF2-40B4-BE49-F238E27FC236}">
-                <a16:creationId xmlns:a16="http://schemas.microsoft.com/office/drawing/2014/main" id="{6C4409B1-0E78-4A43-AD08-F310AA08DF42}"/>
-              </a:ext>
-            </a:extLst>
-          </p:cNvPr>
+          <p:cNvPr id="2" name="Title Placeholder 1"/>
           <p:cNvSpPr>
             <a:spLocks noGrp="1"/>
           </p:cNvSpPr>
@@ -2803,8 +2454,8 @@
         </p:nvSpPr>
         <p:spPr>
           <a:xfrm>
-            <a:off x="838200" y="365125"/>
-            <a:ext cx="10515600" cy="1325563"/>
+            <a:off x="1383030" y="584201"/>
+            <a:ext cx="17350740" cy="2120901"/>
           </a:xfrm>
           <a:prstGeom prst="rect">
             <a:avLst/>
@@ -2820,19 +2471,13 @@
               <a:rPr lang="en-US"/>
               <a:t>Click to edit Master title style</a:t>
             </a:r>
-            <a:endParaRPr lang="ar-EG"/>
-          </a:p>
-        </p:txBody>
-      </p:sp>
-      <p:sp>
-        <p:nvSpPr>
-          <p:cNvPr id="3" name="Text Placeholder 2">
-            <a:extLst>
-              <a:ext uri="{FF2B5EF4-FFF2-40B4-BE49-F238E27FC236}">
-                <a16:creationId xmlns:a16="http://schemas.microsoft.com/office/drawing/2014/main" id="{2B941FA6-6D03-407F-A88D-254C057385B2}"/>
-              </a:ext>
-            </a:extLst>
-          </p:cNvPr>
+            <a:endParaRPr lang="en-US" dirty="0"/>
+          </a:p>
+        </p:txBody>
+      </p:sp>
+      <p:sp>
+        <p:nvSpPr>
+          <p:cNvPr id="3" name="Text Placeholder 2"/>
           <p:cNvSpPr>
             <a:spLocks noGrp="1"/>
           </p:cNvSpPr>
@@ -2842,8 +2487,8 @@
         </p:nvSpPr>
         <p:spPr>
           <a:xfrm>
-            <a:off x="838200" y="1825625"/>
-            <a:ext cx="10515600" cy="4351338"/>
+            <a:off x="1383030" y="2921000"/>
+            <a:ext cx="17350740" cy="6962141"/>
           </a:xfrm>
           <a:prstGeom prst="rect">
             <a:avLst/>
@@ -2888,19 +2533,13 @@
               <a:rPr lang="en-US"/>
               <a:t>Fifth level</a:t>
             </a:r>
-            <a:endParaRPr lang="ar-EG"/>
-          </a:p>
-        </p:txBody>
-      </p:sp>
-      <p:sp>
-        <p:nvSpPr>
-          <p:cNvPr id="4" name="Date Placeholder 3">
-            <a:extLst>
-              <a:ext uri="{FF2B5EF4-FFF2-40B4-BE49-F238E27FC236}">
-                <a16:creationId xmlns:a16="http://schemas.microsoft.com/office/drawing/2014/main" id="{B9DACE5E-46A3-4E52-86B8-47AD444A3F14}"/>
-              </a:ext>
-            </a:extLst>
-          </p:cNvPr>
+            <a:endParaRPr lang="en-US" dirty="0"/>
+          </a:p>
+        </p:txBody>
+      </p:sp>
+      <p:sp>
+        <p:nvSpPr>
+          <p:cNvPr id="4" name="Date Placeholder 3"/>
           <p:cNvSpPr>
             <a:spLocks noGrp="1"/>
           </p:cNvSpPr>
@@ -2910,8 +2549,8 @@
         </p:nvSpPr>
         <p:spPr>
           <a:xfrm>
-            <a:off x="838200" y="6356350"/>
-            <a:ext cx="2743200" cy="365125"/>
+            <a:off x="1383030" y="10170161"/>
+            <a:ext cx="4526280" cy="584200"/>
           </a:xfrm>
           <a:prstGeom prst="rect">
             <a:avLst/>
@@ -2920,8 +2559,8 @@
         <p:txBody>
           <a:bodyPr vert="horz" lIns="91440" tIns="45720" rIns="91440" bIns="45720" rtlCol="0" anchor="ctr"/>
           <a:lstStyle>
-            <a:lvl1pPr algn="r">
-              <a:defRPr sz="1200">
+            <a:lvl1pPr algn="l">
+              <a:defRPr sz="1920">
                 <a:solidFill>
                   <a:schemeClr val="tx1">
                     <a:tint val="75000"/>
@@ -2933,7 +2572,7 @@
           <a:p>
             <a:fld id="{E73D85F0-5B66-4BE3-8DE5-F98511BA27F7}" type="datetimeFigureOut">
               <a:rPr lang="ar-EG" smtClean="0"/>
-              <a:t>28/02/1446</a:t>
+              <a:t>21/01/1447</a:t>
             </a:fld>
             <a:endParaRPr lang="ar-EG"/>
           </a:p>
@@ -2941,13 +2580,7 @@
       </p:sp>
       <p:sp>
         <p:nvSpPr>
-          <p:cNvPr id="5" name="Footer Placeholder 4">
-            <a:extLst>
-              <a:ext uri="{FF2B5EF4-FFF2-40B4-BE49-F238E27FC236}">
-                <a16:creationId xmlns:a16="http://schemas.microsoft.com/office/drawing/2014/main" id="{C2642B26-CC1E-44A4-A7BA-D91DBA2ED5DB}"/>
-              </a:ext>
-            </a:extLst>
-          </p:cNvPr>
+          <p:cNvPr id="5" name="Footer Placeholder 4"/>
           <p:cNvSpPr>
             <a:spLocks noGrp="1"/>
           </p:cNvSpPr>
@@ -2957,8 +2590,8 @@
         </p:nvSpPr>
         <p:spPr>
           <a:xfrm>
-            <a:off x="4038600" y="6356350"/>
-            <a:ext cx="4114800" cy="365125"/>
+            <a:off x="6663690" y="10170161"/>
+            <a:ext cx="6789420" cy="584200"/>
           </a:xfrm>
           <a:prstGeom prst="rect">
             <a:avLst/>
@@ -2968,7 +2601,7 @@
           <a:bodyPr vert="horz" lIns="91440" tIns="45720" rIns="91440" bIns="45720" rtlCol="0" anchor="ctr"/>
           <a:lstStyle>
             <a:lvl1pPr algn="ctr">
-              <a:defRPr sz="1200">
+              <a:defRPr sz="1920">
                 <a:solidFill>
                   <a:schemeClr val="tx1">
                     <a:tint val="75000"/>
@@ -2984,13 +2617,7 @@
       </p:sp>
       <p:sp>
         <p:nvSpPr>
-          <p:cNvPr id="6" name="Slide Number Placeholder 5">
-            <a:extLst>
-              <a:ext uri="{FF2B5EF4-FFF2-40B4-BE49-F238E27FC236}">
-                <a16:creationId xmlns:a16="http://schemas.microsoft.com/office/drawing/2014/main" id="{A4FD9BF8-E951-48D3-89D2-551E335B48A6}"/>
-              </a:ext>
-            </a:extLst>
-          </p:cNvPr>
+          <p:cNvPr id="6" name="Slide Number Placeholder 5"/>
           <p:cNvSpPr>
             <a:spLocks noGrp="1"/>
           </p:cNvSpPr>
@@ -3000,8 +2627,8 @@
         </p:nvSpPr>
         <p:spPr>
           <a:xfrm>
-            <a:off x="8610600" y="6356350"/>
-            <a:ext cx="2743200" cy="365125"/>
+            <a:off x="14207490" y="10170161"/>
+            <a:ext cx="4526280" cy="584200"/>
           </a:xfrm>
           <a:prstGeom prst="rect">
             <a:avLst/>
@@ -3010,8 +2637,8 @@
         <p:txBody>
           <a:bodyPr vert="horz" lIns="91440" tIns="45720" rIns="91440" bIns="45720" rtlCol="0" anchor="ctr"/>
           <a:lstStyle>
-            <a:lvl1pPr algn="l">
-              <a:defRPr sz="1200">
+            <a:lvl1pPr algn="r">
+              <a:defRPr sz="1920">
                 <a:solidFill>
                   <a:schemeClr val="tx1">
                     <a:tint val="75000"/>
@@ -3032,27 +2659,27 @@
     </p:spTree>
     <p:extLst>
       <p:ext uri="{BB962C8B-B14F-4D97-AF65-F5344CB8AC3E}">
-        <p14:creationId xmlns:p14="http://schemas.microsoft.com/office/powerpoint/2010/main" val="2485530028"/>
+        <p14:creationId xmlns:p14="http://schemas.microsoft.com/office/powerpoint/2010/main" val="2353744650"/>
       </p:ext>
     </p:extLst>
   </p:cSld>
   <p:clrMap bg1="lt1" tx1="dk1" bg2="lt2" tx2="dk2" accent1="accent1" accent2="accent2" accent3="accent3" accent4="accent4" accent5="accent5" accent6="accent6" hlink="hlink" folHlink="folHlink"/>
   <p:sldLayoutIdLst>
-    <p:sldLayoutId id="2147483649" r:id="rId1"/>
-    <p:sldLayoutId id="2147483650" r:id="rId2"/>
-    <p:sldLayoutId id="2147483651" r:id="rId3"/>
-    <p:sldLayoutId id="2147483652" r:id="rId4"/>
-    <p:sldLayoutId id="2147483653" r:id="rId5"/>
-    <p:sldLayoutId id="2147483654" r:id="rId6"/>
-    <p:sldLayoutId id="2147483655" r:id="rId7"/>
-    <p:sldLayoutId id="2147483656" r:id="rId8"/>
-    <p:sldLayoutId id="2147483657" r:id="rId9"/>
-    <p:sldLayoutId id="2147483658" r:id="rId10"/>
-    <p:sldLayoutId id="2147483659" r:id="rId11"/>
+    <p:sldLayoutId id="2147483685" r:id="rId1"/>
+    <p:sldLayoutId id="2147483686" r:id="rId2"/>
+    <p:sldLayoutId id="2147483687" r:id="rId3"/>
+    <p:sldLayoutId id="2147483688" r:id="rId4"/>
+    <p:sldLayoutId id="2147483689" r:id="rId5"/>
+    <p:sldLayoutId id="2147483690" r:id="rId6"/>
+    <p:sldLayoutId id="2147483691" r:id="rId7"/>
+    <p:sldLayoutId id="2147483692" r:id="rId8"/>
+    <p:sldLayoutId id="2147483693" r:id="rId9"/>
+    <p:sldLayoutId id="2147483694" r:id="rId10"/>
+    <p:sldLayoutId id="2147483695" r:id="rId11"/>
   </p:sldLayoutIdLst>
   <p:txStyles>
     <p:titleStyle>
-      <a:lvl1pPr algn="l" defTabSz="914400" rtl="0" eaLnBrk="1" latinLnBrk="0" hangingPunct="1">
+      <a:lvl1pPr algn="l" defTabSz="1463040" rtl="1" eaLnBrk="1" latinLnBrk="0" hangingPunct="1">
         <a:lnSpc>
           <a:spcPct val="90000"/>
         </a:lnSpc>
@@ -3060,7 +2687,7 @@
           <a:spcPct val="0"/>
         </a:spcBef>
         <a:buNone/>
-        <a:defRPr sz="4400" kern="1200">
+        <a:defRPr sz="7040" kern="1200">
           <a:solidFill>
             <a:schemeClr val="tx1"/>
           </a:solidFill>
@@ -3071,16 +2698,16 @@
       </a:lvl1pPr>
     </p:titleStyle>
     <p:bodyStyle>
-      <a:lvl1pPr marL="228600" indent="-228600" algn="l" defTabSz="914400" rtl="0" eaLnBrk="1" latinLnBrk="0" hangingPunct="1">
+      <a:lvl1pPr marL="365760" indent="-365760" algn="r" defTabSz="1463040" rtl="1" eaLnBrk="1" latinLnBrk="0" hangingPunct="1">
         <a:lnSpc>
           <a:spcPct val="90000"/>
         </a:lnSpc>
         <a:spcBef>
-          <a:spcPts val="1000"/>
+          <a:spcPts val="1600"/>
         </a:spcBef>
         <a:buFont typeface="Arial" panose="020B0604020202020204" pitchFamily="34" charset="0"/>
         <a:buChar char="•"/>
-        <a:defRPr sz="2800" kern="1200">
+        <a:defRPr sz="4480" kern="1200">
           <a:solidFill>
             <a:schemeClr val="tx1"/>
           </a:solidFill>
@@ -3089,16 +2716,16 @@
           <a:cs typeface="+mn-cs"/>
         </a:defRPr>
       </a:lvl1pPr>
-      <a:lvl2pPr marL="685800" indent="-228600" algn="l" defTabSz="914400" rtl="0" eaLnBrk="1" latinLnBrk="0" hangingPunct="1">
+      <a:lvl2pPr marL="1097280" indent="-365760" algn="r" defTabSz="1463040" rtl="1" eaLnBrk="1" latinLnBrk="0" hangingPunct="1">
         <a:lnSpc>
           <a:spcPct val="90000"/>
         </a:lnSpc>
         <a:spcBef>
-          <a:spcPts val="500"/>
+          <a:spcPts val="800"/>
         </a:spcBef>
         <a:buFont typeface="Arial" panose="020B0604020202020204" pitchFamily="34" charset="0"/>
         <a:buChar char="•"/>
-        <a:defRPr sz="2400" kern="1200">
+        <a:defRPr sz="3840" kern="1200">
           <a:solidFill>
             <a:schemeClr val="tx1"/>
           </a:solidFill>
@@ -3107,16 +2734,16 @@
           <a:cs typeface="+mn-cs"/>
         </a:defRPr>
       </a:lvl2pPr>
-      <a:lvl3pPr marL="1143000" indent="-228600" algn="l" defTabSz="914400" rtl="0" eaLnBrk="1" latinLnBrk="0" hangingPunct="1">
+      <a:lvl3pPr marL="1828800" indent="-365760" algn="r" defTabSz="1463040" rtl="1" eaLnBrk="1" latinLnBrk="0" hangingPunct="1">
         <a:lnSpc>
           <a:spcPct val="90000"/>
         </a:lnSpc>
         <a:spcBef>
-          <a:spcPts val="500"/>
+          <a:spcPts val="800"/>
         </a:spcBef>
         <a:buFont typeface="Arial" panose="020B0604020202020204" pitchFamily="34" charset="0"/>
         <a:buChar char="•"/>
-        <a:defRPr sz="2000" kern="1200">
+        <a:defRPr sz="3200" kern="1200">
           <a:solidFill>
             <a:schemeClr val="tx1"/>
           </a:solidFill>
@@ -3125,16 +2752,16 @@
           <a:cs typeface="+mn-cs"/>
         </a:defRPr>
       </a:lvl3pPr>
-      <a:lvl4pPr marL="1600200" indent="-228600" algn="l" defTabSz="914400" rtl="0" eaLnBrk="1" latinLnBrk="0" hangingPunct="1">
+      <a:lvl4pPr marL="2560320" indent="-365760" algn="r" defTabSz="1463040" rtl="1" eaLnBrk="1" latinLnBrk="0" hangingPunct="1">
         <a:lnSpc>
           <a:spcPct val="90000"/>
         </a:lnSpc>
         <a:spcBef>
-          <a:spcPts val="500"/>
+          <a:spcPts val="800"/>
         </a:spcBef>
         <a:buFont typeface="Arial" panose="020B0604020202020204" pitchFamily="34" charset="0"/>
         <a:buChar char="•"/>
-        <a:defRPr sz="1800" kern="1200">
+        <a:defRPr sz="2880" kern="1200">
           <a:solidFill>
             <a:schemeClr val="tx1"/>
           </a:solidFill>
@@ -3143,16 +2770,16 @@
           <a:cs typeface="+mn-cs"/>
         </a:defRPr>
       </a:lvl4pPr>
-      <a:lvl5pPr marL="2057400" indent="-228600" algn="l" defTabSz="914400" rtl="0" eaLnBrk="1" latinLnBrk="0" hangingPunct="1">
+      <a:lvl5pPr marL="3291840" indent="-365760" algn="r" defTabSz="1463040" rtl="1" eaLnBrk="1" latinLnBrk="0" hangingPunct="1">
         <a:lnSpc>
           <a:spcPct val="90000"/>
         </a:lnSpc>
         <a:spcBef>
-          <a:spcPts val="500"/>
+          <a:spcPts val="800"/>
         </a:spcBef>
         <a:buFont typeface="Arial" panose="020B0604020202020204" pitchFamily="34" charset="0"/>
         <a:buChar char="•"/>
-        <a:defRPr sz="1800" kern="1200">
+        <a:defRPr sz="2880" kern="1200">
           <a:solidFill>
             <a:schemeClr val="tx1"/>
           </a:solidFill>
@@ -3161,16 +2788,16 @@
           <a:cs typeface="+mn-cs"/>
         </a:defRPr>
       </a:lvl5pPr>
-      <a:lvl6pPr marL="2514600" indent="-228600" algn="l" defTabSz="914400" rtl="0" eaLnBrk="1" latinLnBrk="0" hangingPunct="1">
+      <a:lvl6pPr marL="4023360" indent="-365760" algn="r" defTabSz="1463040" rtl="1" eaLnBrk="1" latinLnBrk="0" hangingPunct="1">
         <a:lnSpc>
           <a:spcPct val="90000"/>
         </a:lnSpc>
         <a:spcBef>
-          <a:spcPts val="500"/>
+          <a:spcPts val="800"/>
         </a:spcBef>
         <a:buFont typeface="Arial" panose="020B0604020202020204" pitchFamily="34" charset="0"/>
         <a:buChar char="•"/>
-        <a:defRPr sz="1800" kern="1200">
+        <a:defRPr sz="2880" kern="1200">
           <a:solidFill>
             <a:schemeClr val="tx1"/>
           </a:solidFill>
@@ -3179,16 +2806,16 @@
           <a:cs typeface="+mn-cs"/>
         </a:defRPr>
       </a:lvl6pPr>
-      <a:lvl7pPr marL="2971800" indent="-228600" algn="l" defTabSz="914400" rtl="0" eaLnBrk="1" latinLnBrk="0" hangingPunct="1">
+      <a:lvl7pPr marL="4754880" indent="-365760" algn="r" defTabSz="1463040" rtl="1" eaLnBrk="1" latinLnBrk="0" hangingPunct="1">
         <a:lnSpc>
           <a:spcPct val="90000"/>
         </a:lnSpc>
         <a:spcBef>
-          <a:spcPts val="500"/>
+          <a:spcPts val="800"/>
         </a:spcBef>
         <a:buFont typeface="Arial" panose="020B0604020202020204" pitchFamily="34" charset="0"/>
         <a:buChar char="•"/>
-        <a:defRPr sz="1800" kern="1200">
+        <a:defRPr sz="2880" kern="1200">
           <a:solidFill>
             <a:schemeClr val="tx1"/>
           </a:solidFill>
@@ -3197,16 +2824,16 @@
           <a:cs typeface="+mn-cs"/>
         </a:defRPr>
       </a:lvl7pPr>
-      <a:lvl8pPr marL="3429000" indent="-228600" algn="l" defTabSz="914400" rtl="0" eaLnBrk="1" latinLnBrk="0" hangingPunct="1">
+      <a:lvl8pPr marL="5486400" indent="-365760" algn="r" defTabSz="1463040" rtl="1" eaLnBrk="1" latinLnBrk="0" hangingPunct="1">
         <a:lnSpc>
           <a:spcPct val="90000"/>
         </a:lnSpc>
         <a:spcBef>
-          <a:spcPts val="500"/>
+          <a:spcPts val="800"/>
         </a:spcBef>
         <a:buFont typeface="Arial" panose="020B0604020202020204" pitchFamily="34" charset="0"/>
         <a:buChar char="•"/>
-        <a:defRPr sz="1800" kern="1200">
+        <a:defRPr sz="2880" kern="1200">
           <a:solidFill>
             <a:schemeClr val="tx1"/>
           </a:solidFill>
@@ -3215,16 +2842,16 @@
           <a:cs typeface="+mn-cs"/>
         </a:defRPr>
       </a:lvl8pPr>
-      <a:lvl9pPr marL="3886200" indent="-228600" algn="l" defTabSz="914400" rtl="0" eaLnBrk="1" latinLnBrk="0" hangingPunct="1">
+      <a:lvl9pPr marL="6217920" indent="-365760" algn="r" defTabSz="1463040" rtl="1" eaLnBrk="1" latinLnBrk="0" hangingPunct="1">
         <a:lnSpc>
           <a:spcPct val="90000"/>
         </a:lnSpc>
         <a:spcBef>
-          <a:spcPts val="500"/>
+          <a:spcPts val="800"/>
         </a:spcBef>
         <a:buFont typeface="Arial" panose="020B0604020202020204" pitchFamily="34" charset="0"/>
         <a:buChar char="•"/>
-        <a:defRPr sz="1800" kern="1200">
+        <a:defRPr sz="2880" kern="1200">
           <a:solidFill>
             <a:schemeClr val="tx1"/>
           </a:solidFill>
@@ -3236,10 +2863,10 @@
     </p:bodyStyle>
     <p:otherStyle>
       <a:defPPr>
-        <a:defRPr lang="ar-EG"/>
+        <a:defRPr lang="en-US"/>
       </a:defPPr>
-      <a:lvl1pPr marL="0" algn="l" defTabSz="914400" rtl="0" eaLnBrk="1" latinLnBrk="0" hangingPunct="1">
-        <a:defRPr sz="1800" kern="1200">
+      <a:lvl1pPr marL="0" algn="r" defTabSz="1463040" rtl="1" eaLnBrk="1" latinLnBrk="0" hangingPunct="1">
+        <a:defRPr sz="2880" kern="1200">
           <a:solidFill>
             <a:schemeClr val="tx1"/>
           </a:solidFill>
@@ -3248,8 +2875,8 @@
           <a:cs typeface="+mn-cs"/>
         </a:defRPr>
       </a:lvl1pPr>
-      <a:lvl2pPr marL="457200" algn="l" defTabSz="914400" rtl="0" eaLnBrk="1" latinLnBrk="0" hangingPunct="1">
-        <a:defRPr sz="1800" kern="1200">
+      <a:lvl2pPr marL="731520" algn="r" defTabSz="1463040" rtl="1" eaLnBrk="1" latinLnBrk="0" hangingPunct="1">
+        <a:defRPr sz="2880" kern="1200">
           <a:solidFill>
             <a:schemeClr val="tx1"/>
           </a:solidFill>
@@ -3258,8 +2885,8 @@
           <a:cs typeface="+mn-cs"/>
         </a:defRPr>
       </a:lvl2pPr>
-      <a:lvl3pPr marL="914400" algn="l" defTabSz="914400" rtl="0" eaLnBrk="1" latinLnBrk="0" hangingPunct="1">
-        <a:defRPr sz="1800" kern="1200">
+      <a:lvl3pPr marL="1463040" algn="r" defTabSz="1463040" rtl="1" eaLnBrk="1" latinLnBrk="0" hangingPunct="1">
+        <a:defRPr sz="2880" kern="1200">
           <a:solidFill>
             <a:schemeClr val="tx1"/>
           </a:solidFill>
@@ -3268,8 +2895,8 @@
           <a:cs typeface="+mn-cs"/>
         </a:defRPr>
       </a:lvl3pPr>
-      <a:lvl4pPr marL="1371600" algn="l" defTabSz="914400" rtl="0" eaLnBrk="1" latinLnBrk="0" hangingPunct="1">
-        <a:defRPr sz="1800" kern="1200">
+      <a:lvl4pPr marL="2194560" algn="r" defTabSz="1463040" rtl="1" eaLnBrk="1" latinLnBrk="0" hangingPunct="1">
+        <a:defRPr sz="2880" kern="1200">
           <a:solidFill>
             <a:schemeClr val="tx1"/>
           </a:solidFill>
@@ -3278,8 +2905,8 @@
           <a:cs typeface="+mn-cs"/>
         </a:defRPr>
       </a:lvl4pPr>
-      <a:lvl5pPr marL="1828800" algn="l" defTabSz="914400" rtl="0" eaLnBrk="1" latinLnBrk="0" hangingPunct="1">
-        <a:defRPr sz="1800" kern="1200">
+      <a:lvl5pPr marL="2926080" algn="r" defTabSz="1463040" rtl="1" eaLnBrk="1" latinLnBrk="0" hangingPunct="1">
+        <a:defRPr sz="2880" kern="1200">
           <a:solidFill>
             <a:schemeClr val="tx1"/>
           </a:solidFill>
@@ -3288,8 +2915,8 @@
           <a:cs typeface="+mn-cs"/>
         </a:defRPr>
       </a:lvl5pPr>
-      <a:lvl6pPr marL="2286000" algn="l" defTabSz="914400" rtl="0" eaLnBrk="1" latinLnBrk="0" hangingPunct="1">
-        <a:defRPr sz="1800" kern="1200">
+      <a:lvl6pPr marL="3657600" algn="r" defTabSz="1463040" rtl="1" eaLnBrk="1" latinLnBrk="0" hangingPunct="1">
+        <a:defRPr sz="2880" kern="1200">
           <a:solidFill>
             <a:schemeClr val="tx1"/>
           </a:solidFill>
@@ -3298,8 +2925,8 @@
           <a:cs typeface="+mn-cs"/>
         </a:defRPr>
       </a:lvl6pPr>
-      <a:lvl7pPr marL="2743200" algn="l" defTabSz="914400" rtl="0" eaLnBrk="1" latinLnBrk="0" hangingPunct="1">
-        <a:defRPr sz="1800" kern="1200">
+      <a:lvl7pPr marL="4389120" algn="r" defTabSz="1463040" rtl="1" eaLnBrk="1" latinLnBrk="0" hangingPunct="1">
+        <a:defRPr sz="2880" kern="1200">
           <a:solidFill>
             <a:schemeClr val="tx1"/>
           </a:solidFill>
@@ -3308,8 +2935,8 @@
           <a:cs typeface="+mn-cs"/>
         </a:defRPr>
       </a:lvl7pPr>
-      <a:lvl8pPr marL="3200400" algn="l" defTabSz="914400" rtl="0" eaLnBrk="1" latinLnBrk="0" hangingPunct="1">
-        <a:defRPr sz="1800" kern="1200">
+      <a:lvl8pPr marL="5120640" algn="r" defTabSz="1463040" rtl="1" eaLnBrk="1" latinLnBrk="0" hangingPunct="1">
+        <a:defRPr sz="2880" kern="1200">
           <a:solidFill>
             <a:schemeClr val="tx1"/>
           </a:solidFill>
@@ -3318,8 +2945,8 @@
           <a:cs typeface="+mn-cs"/>
         </a:defRPr>
       </a:lvl8pPr>
-      <a:lvl9pPr marL="3657600" algn="l" defTabSz="914400" rtl="0" eaLnBrk="1" latinLnBrk="0" hangingPunct="1">
-        <a:defRPr sz="1800" kern="1200">
+      <a:lvl9pPr marL="5852160" algn="r" defTabSz="1463040" rtl="1" eaLnBrk="1" latinLnBrk="0" hangingPunct="1">
+        <a:defRPr sz="2880" kern="1200">
           <a:solidFill>
             <a:schemeClr val="tx1"/>
           </a:solidFill>
@@ -3364,7 +2991,7 @@
         </p:nvSpPr>
         <p:spPr>
           <a:xfrm>
-            <a:off x="1936474" y="2504661"/>
+            <a:off x="5898875" y="4562065"/>
             <a:ext cx="8160026" cy="1325563"/>
           </a:xfrm>
           <a:prstGeom prst="roundRect">
@@ -3491,12 +3118,14 @@
         </p:nvSpPr>
         <p:spPr>
           <a:xfrm>
-            <a:off x="732183" y="472108"/>
+            <a:off x="4694583" y="2529513"/>
             <a:ext cx="10515600" cy="5913783"/>
           </a:xfrm>
         </p:spPr>
         <p:txBody>
-          <a:bodyPr/>
+          <a:bodyPr>
+            <a:normAutofit fontScale="92500" lnSpcReduction="20000"/>
+          </a:bodyPr>
           <a:lstStyle/>
           <a:p>
             <a:pPr marL="0" indent="0">
@@ -3628,7 +3257,7 @@
         </p:nvSpPr>
         <p:spPr>
           <a:xfrm>
-            <a:off x="944217" y="606287"/>
+            <a:off x="4906617" y="2663691"/>
             <a:ext cx="2584174" cy="894521"/>
           </a:xfrm>
           <a:prstGeom prst="roundRect">
@@ -3655,9 +3284,7 @@
           <a:bodyPr rtlCol="1" anchor="ctr"/>
           <a:lstStyle/>
           <a:p>
-            <a:pPr marL="0" indent="0" algn="ctr">
-              <a:buNone/>
-            </a:pPr>
+            <a:pPr algn="ctr"/>
             <a:r>
               <a:rPr lang="en-US" sz="2800" dirty="0">
                 <a:ln w="0"/>
@@ -3726,13 +3353,13 @@
         </p:nvSpPr>
         <p:spPr>
           <a:xfrm>
-            <a:off x="838200" y="1676539"/>
+            <a:off x="4800600" y="3733939"/>
             <a:ext cx="10515600" cy="4351338"/>
           </a:xfrm>
         </p:spPr>
         <p:txBody>
           <a:bodyPr>
-            <a:normAutofit lnSpcReduction="10000"/>
+            <a:normAutofit fontScale="85000" lnSpcReduction="20000"/>
           </a:bodyPr>
           <a:lstStyle/>
           <a:p>
@@ -3867,7 +3494,7 @@
         </p:nvSpPr>
         <p:spPr>
           <a:xfrm>
-            <a:off x="944217" y="606287"/>
+            <a:off x="4906618" y="2663691"/>
             <a:ext cx="3359426" cy="894521"/>
           </a:xfrm>
           <a:prstGeom prst="roundRect">
@@ -3983,7 +3610,7 @@
             </a:r>
           </a:p>
           <a:p>
-            <a:pPr marL="576263" indent="-179388"/>
+            <a:pPr marL="576258" indent="-179386"/>
             <a:r>
               <a:rPr lang="en-US" sz="2000" dirty="0">
                 <a:latin typeface="Arial" panose="020B0604020202020204" pitchFamily="34" charset="0"/>
@@ -4008,7 +3635,7 @@
             </a:r>
           </a:p>
           <a:p>
-            <a:pPr marL="576263" indent="-119063"/>
+            <a:pPr marL="576258" indent="-119062"/>
             <a:r>
               <a:rPr lang="en-US" sz="2000" dirty="0">
                 <a:latin typeface="Arial" panose="020B0604020202020204" pitchFamily="34" charset="0"/>
@@ -4033,7 +3660,7 @@
             </a:r>
           </a:p>
           <a:p>
-            <a:pPr marL="685800" indent="-168275"/>
+            <a:pPr marL="685793" indent="-168274"/>
             <a:r>
               <a:rPr lang="en-US" sz="2000" dirty="0">
                 <a:latin typeface="Arial" panose="020B0604020202020204" pitchFamily="34" charset="0"/>
@@ -4058,7 +3685,7 @@
             </a:r>
           </a:p>
           <a:p>
-            <a:pPr marL="685800" indent="-109538"/>
+            <a:pPr marL="685793" indent="-109537"/>
             <a:r>
               <a:rPr lang="en-US" sz="2000" dirty="0">
                 <a:latin typeface="Arial" panose="020B0604020202020204" pitchFamily="34" charset="0"/>
@@ -4087,7 +3714,7 @@
         </p:nvSpPr>
         <p:spPr>
           <a:xfrm>
-            <a:off x="838200" y="596349"/>
+            <a:off x="4800601" y="2653754"/>
             <a:ext cx="1338470" cy="894521"/>
           </a:xfrm>
           <a:prstGeom prst="roundRect">
@@ -4148,10 +3775,808 @@
 </p:sld>
 </file>
 
+<file path=ppt/slides/slide5.xml><?xml version="1.0" encoding="utf-8"?>
+<p:sld xmlns:a="http://schemas.openxmlformats.org/drawingml/2006/main" xmlns:r="http://schemas.openxmlformats.org/officeDocument/2006/relationships" xmlns:p="http://schemas.openxmlformats.org/presentationml/2006/main">
+  <p:cSld>
+    <p:spTree>
+      <p:nvGrpSpPr>
+        <p:cNvPr id="1" name=""/>
+        <p:cNvGrpSpPr/>
+        <p:nvPr/>
+      </p:nvGrpSpPr>
+      <p:grpSpPr>
+        <a:xfrm>
+          <a:off x="0" y="0"/>
+          <a:ext cx="0" cy="0"/>
+          <a:chOff x="0" y="0"/>
+          <a:chExt cx="0" cy="0"/>
+        </a:xfrm>
+      </p:grpSpPr>
+      <p:sp>
+        <p:nvSpPr>
+          <p:cNvPr id="4" name="Rectangle: Rounded Corners 3">
+            <a:extLst>
+              <a:ext uri="{FF2B5EF4-FFF2-40B4-BE49-F238E27FC236}">
+                <a16:creationId xmlns:a16="http://schemas.microsoft.com/office/drawing/2014/main" id="{240526CE-4FF5-45FA-B17C-7BF400BA7E9C}"/>
+              </a:ext>
+            </a:extLst>
+          </p:cNvPr>
+          <p:cNvSpPr/>
+          <p:nvPr/>
+        </p:nvSpPr>
+        <p:spPr>
+          <a:xfrm>
+            <a:off x="192504" y="112297"/>
+            <a:ext cx="19726573" cy="10860505"/>
+          </a:xfrm>
+          <a:prstGeom prst="roundRect">
+            <a:avLst>
+              <a:gd name="adj" fmla="val 2758"/>
+            </a:avLst>
+          </a:prstGeom>
+          <a:solidFill>
+            <a:srgbClr val="F3F4F7"/>
+          </a:solidFill>
+          <a:ln>
+            <a:noFill/>
+          </a:ln>
+        </p:spPr>
+        <p:style>
+          <a:lnRef idx="2">
+            <a:schemeClr val="accent1">
+              <a:shade val="50000"/>
+            </a:schemeClr>
+          </a:lnRef>
+          <a:fillRef idx="1">
+            <a:schemeClr val="accent1"/>
+          </a:fillRef>
+          <a:effectRef idx="0">
+            <a:schemeClr val="accent1"/>
+          </a:effectRef>
+          <a:fontRef idx="minor">
+            <a:schemeClr val="lt1"/>
+          </a:fontRef>
+        </p:style>
+        <p:txBody>
+          <a:bodyPr rtlCol="1" anchor="ctr"/>
+          <a:lstStyle/>
+          <a:p>
+            <a:pPr algn="ctr"/>
+            <a:endParaRPr lang="ar-EG" sz="353" dirty="0"/>
+          </a:p>
+        </p:txBody>
+      </p:sp>
+      <p:grpSp>
+        <p:nvGrpSpPr>
+          <p:cNvPr id="7" name="Group 6">
+            <a:extLst>
+              <a:ext uri="{FF2B5EF4-FFF2-40B4-BE49-F238E27FC236}">
+                <a16:creationId xmlns:a16="http://schemas.microsoft.com/office/drawing/2014/main" id="{A81604FF-C59E-4CE1-8495-F57CE6138F48}"/>
+              </a:ext>
+            </a:extLst>
+          </p:cNvPr>
+          <p:cNvGrpSpPr/>
+          <p:nvPr/>
+        </p:nvGrpSpPr>
+        <p:grpSpPr>
+          <a:xfrm>
+            <a:off x="1426447" y="479109"/>
+            <a:ext cx="5673733" cy="3850165"/>
+            <a:chOff x="6095999" y="3962399"/>
+            <a:chExt cx="4572000" cy="3200400"/>
+          </a:xfrm>
+        </p:grpSpPr>
+        <p:sp>
+          <p:nvSpPr>
+            <p:cNvPr id="6" name="Rectangle: Rounded Corners 5">
+              <a:extLst>
+                <a:ext uri="{FF2B5EF4-FFF2-40B4-BE49-F238E27FC236}">
+                  <a16:creationId xmlns:a16="http://schemas.microsoft.com/office/drawing/2014/main" id="{3EB242D7-A3AF-41F0-9349-D688FD055A9F}"/>
+                </a:ext>
+              </a:extLst>
+            </p:cNvPr>
+            <p:cNvSpPr/>
+            <p:nvPr/>
+          </p:nvSpPr>
+          <p:spPr>
+            <a:xfrm>
+              <a:off x="6095999" y="3962399"/>
+              <a:ext cx="4572000" cy="3200400"/>
+            </a:xfrm>
+            <a:prstGeom prst="roundRect">
+              <a:avLst/>
+            </a:prstGeom>
+            <a:solidFill>
+              <a:schemeClr val="bg1">
+                <a:lumMod val="85000"/>
+              </a:schemeClr>
+            </a:solidFill>
+            <a:ln>
+              <a:noFill/>
+            </a:ln>
+            <a:effectLst>
+              <a:outerShdw blurRad="127000" dist="127000" dir="13500000" algn="br" rotWithShape="0">
+                <a:schemeClr val="bg1">
+                  <a:alpha val="40000"/>
+                </a:schemeClr>
+              </a:outerShdw>
+            </a:effectLst>
+          </p:spPr>
+          <p:style>
+            <a:lnRef idx="2">
+              <a:schemeClr val="accent1">
+                <a:shade val="50000"/>
+              </a:schemeClr>
+            </a:lnRef>
+            <a:fillRef idx="1">
+              <a:schemeClr val="accent1"/>
+            </a:fillRef>
+            <a:effectRef idx="0">
+              <a:schemeClr val="accent1"/>
+            </a:effectRef>
+            <a:fontRef idx="minor">
+              <a:schemeClr val="lt1"/>
+            </a:fontRef>
+          </p:style>
+          <p:txBody>
+            <a:bodyPr rtlCol="1" anchor="ctr"/>
+            <a:lstStyle/>
+            <a:p>
+              <a:pPr algn="ctr"/>
+              <a:r>
+                <a:rPr lang="en-US" sz="312" dirty="0"/>
+                <a:t> </a:t>
+              </a:r>
+              <a:endParaRPr lang="ar-EG" sz="312" dirty="0"/>
+            </a:p>
+          </p:txBody>
+        </p:sp>
+        <p:sp>
+          <p:nvSpPr>
+            <p:cNvPr id="5" name="Rectangle: Rounded Corners 4">
+              <a:extLst>
+                <a:ext uri="{FF2B5EF4-FFF2-40B4-BE49-F238E27FC236}">
+                  <a16:creationId xmlns:a16="http://schemas.microsoft.com/office/drawing/2014/main" id="{0C6742AA-74E9-4344-9F8C-9B13F02D9060}"/>
+                </a:ext>
+              </a:extLst>
+            </p:cNvPr>
+            <p:cNvSpPr/>
+            <p:nvPr/>
+          </p:nvSpPr>
+          <p:spPr>
+            <a:xfrm>
+              <a:off x="6095999" y="3962399"/>
+              <a:ext cx="4572000" cy="3200400"/>
+            </a:xfrm>
+            <a:prstGeom prst="roundRect">
+              <a:avLst/>
+            </a:prstGeom>
+            <a:gradFill>
+              <a:gsLst>
+                <a:gs pos="0">
+                  <a:srgbClr val="EDEEF5"/>
+                </a:gs>
+                <a:gs pos="100000">
+                  <a:schemeClr val="bg1"/>
+                </a:gs>
+                <a:gs pos="100000">
+                  <a:schemeClr val="accent1">
+                    <a:lumMod val="45000"/>
+                    <a:lumOff val="55000"/>
+                  </a:schemeClr>
+                </a:gs>
+              </a:gsLst>
+              <a:lin ang="5400000" scaled="1"/>
+            </a:gradFill>
+            <a:ln>
+              <a:noFill/>
+            </a:ln>
+            <a:effectLst>
+              <a:outerShdw blurRad="190500" dist="190500" dir="2700000" algn="tl" rotWithShape="0">
+                <a:schemeClr val="bg1">
+                  <a:lumMod val="65000"/>
+                  <a:alpha val="40000"/>
+                </a:schemeClr>
+              </a:outerShdw>
+            </a:effectLst>
+          </p:spPr>
+          <p:style>
+            <a:lnRef idx="2">
+              <a:schemeClr val="accent1">
+                <a:shade val="50000"/>
+              </a:schemeClr>
+            </a:lnRef>
+            <a:fillRef idx="1">
+              <a:schemeClr val="accent1"/>
+            </a:fillRef>
+            <a:effectRef idx="0">
+              <a:schemeClr val="accent1"/>
+            </a:effectRef>
+            <a:fontRef idx="minor">
+              <a:schemeClr val="lt1"/>
+            </a:fontRef>
+          </p:style>
+          <p:txBody>
+            <a:bodyPr rtlCol="1" anchor="ctr"/>
+            <a:lstStyle/>
+            <a:p>
+              <a:pPr algn="ctr"/>
+              <a:endParaRPr lang="ar-EG" sz="312" dirty="0"/>
+            </a:p>
+          </p:txBody>
+        </p:sp>
+      </p:grpSp>
+      <p:grpSp>
+        <p:nvGrpSpPr>
+          <p:cNvPr id="17" name="Group 16">
+            <a:extLst>
+              <a:ext uri="{FF2B5EF4-FFF2-40B4-BE49-F238E27FC236}">
+                <a16:creationId xmlns:a16="http://schemas.microsoft.com/office/drawing/2014/main" id="{9E15BBD9-42AD-4E44-9F2D-1A65716F87C8}"/>
+              </a:ext>
+            </a:extLst>
+          </p:cNvPr>
+          <p:cNvGrpSpPr/>
+          <p:nvPr/>
+        </p:nvGrpSpPr>
+        <p:grpSpPr>
+          <a:xfrm>
+            <a:off x="1572126" y="5784181"/>
+            <a:ext cx="18015283" cy="4709509"/>
+            <a:chOff x="6095999" y="3962397"/>
+            <a:chExt cx="4572000" cy="3200402"/>
+          </a:xfrm>
+        </p:grpSpPr>
+        <p:sp>
+          <p:nvSpPr>
+            <p:cNvPr id="18" name="Rectangle: Rounded Corners 17">
+              <a:extLst>
+                <a:ext uri="{FF2B5EF4-FFF2-40B4-BE49-F238E27FC236}">
+                  <a16:creationId xmlns:a16="http://schemas.microsoft.com/office/drawing/2014/main" id="{D13D99D8-4C8A-42C8-BF10-993914BFD55C}"/>
+                </a:ext>
+              </a:extLst>
+            </p:cNvPr>
+            <p:cNvSpPr/>
+            <p:nvPr/>
+          </p:nvSpPr>
+          <p:spPr>
+            <a:xfrm>
+              <a:off x="6095999" y="3962399"/>
+              <a:ext cx="4572000" cy="3200400"/>
+            </a:xfrm>
+            <a:prstGeom prst="roundRect">
+              <a:avLst/>
+            </a:prstGeom>
+            <a:solidFill>
+              <a:schemeClr val="bg1">
+                <a:lumMod val="85000"/>
+              </a:schemeClr>
+            </a:solidFill>
+            <a:ln>
+              <a:noFill/>
+            </a:ln>
+            <a:effectLst>
+              <a:outerShdw blurRad="127000" dist="127000" dir="13500000" algn="br" rotWithShape="0">
+                <a:schemeClr val="bg1">
+                  <a:alpha val="40000"/>
+                </a:schemeClr>
+              </a:outerShdw>
+            </a:effectLst>
+          </p:spPr>
+          <p:style>
+            <a:lnRef idx="2">
+              <a:schemeClr val="accent1">
+                <a:shade val="50000"/>
+              </a:schemeClr>
+            </a:lnRef>
+            <a:fillRef idx="1">
+              <a:schemeClr val="accent1"/>
+            </a:fillRef>
+            <a:effectRef idx="0">
+              <a:schemeClr val="accent1"/>
+            </a:effectRef>
+            <a:fontRef idx="minor">
+              <a:schemeClr val="lt1"/>
+            </a:fontRef>
+          </p:style>
+          <p:txBody>
+            <a:bodyPr rtlCol="1" anchor="ctr"/>
+            <a:lstStyle/>
+            <a:p>
+              <a:pPr algn="ctr"/>
+              <a:r>
+                <a:rPr lang="en-US" sz="312" dirty="0"/>
+                <a:t> </a:t>
+              </a:r>
+              <a:endParaRPr lang="ar-EG" sz="312" dirty="0"/>
+            </a:p>
+          </p:txBody>
+        </p:sp>
+        <p:sp>
+          <p:nvSpPr>
+            <p:cNvPr id="19" name="Rectangle: Rounded Corners 18">
+              <a:extLst>
+                <a:ext uri="{FF2B5EF4-FFF2-40B4-BE49-F238E27FC236}">
+                  <a16:creationId xmlns:a16="http://schemas.microsoft.com/office/drawing/2014/main" id="{A3C9D596-4CC5-4A3E-836C-089B0E2929F4}"/>
+                </a:ext>
+              </a:extLst>
+            </p:cNvPr>
+            <p:cNvSpPr/>
+            <p:nvPr/>
+          </p:nvSpPr>
+          <p:spPr>
+            <a:xfrm>
+              <a:off x="6095999" y="3962397"/>
+              <a:ext cx="4572000" cy="3200400"/>
+            </a:xfrm>
+            <a:prstGeom prst="roundRect">
+              <a:avLst/>
+            </a:prstGeom>
+            <a:gradFill>
+              <a:gsLst>
+                <a:gs pos="0">
+                  <a:srgbClr val="EDEEF5"/>
+                </a:gs>
+                <a:gs pos="100000">
+                  <a:schemeClr val="bg1"/>
+                </a:gs>
+                <a:gs pos="100000">
+                  <a:schemeClr val="accent1">
+                    <a:lumMod val="45000"/>
+                    <a:lumOff val="55000"/>
+                  </a:schemeClr>
+                </a:gs>
+              </a:gsLst>
+              <a:lin ang="5400000" scaled="1"/>
+            </a:gradFill>
+            <a:ln>
+              <a:noFill/>
+            </a:ln>
+            <a:effectLst>
+              <a:outerShdw blurRad="190500" dist="190500" dir="2700000" algn="tl" rotWithShape="0">
+                <a:schemeClr val="bg1">
+                  <a:lumMod val="65000"/>
+                  <a:alpha val="40000"/>
+                </a:schemeClr>
+              </a:outerShdw>
+            </a:effectLst>
+          </p:spPr>
+          <p:style>
+            <a:lnRef idx="2">
+              <a:schemeClr val="accent1">
+                <a:shade val="50000"/>
+              </a:schemeClr>
+            </a:lnRef>
+            <a:fillRef idx="1">
+              <a:schemeClr val="accent1"/>
+            </a:fillRef>
+            <a:effectRef idx="0">
+              <a:schemeClr val="accent1"/>
+            </a:effectRef>
+            <a:fontRef idx="minor">
+              <a:schemeClr val="lt1"/>
+            </a:fontRef>
+          </p:style>
+          <p:txBody>
+            <a:bodyPr rtlCol="1" anchor="ctr"/>
+            <a:lstStyle/>
+            <a:p>
+              <a:pPr algn="ctr"/>
+              <a:endParaRPr lang="ar-EG" sz="312" dirty="0"/>
+            </a:p>
+          </p:txBody>
+        </p:sp>
+      </p:grpSp>
+      <p:sp>
+        <p:nvSpPr>
+          <p:cNvPr id="20" name="Rectangle: Rounded Corners 19">
+            <a:extLst>
+              <a:ext uri="{FF2B5EF4-FFF2-40B4-BE49-F238E27FC236}">
+                <a16:creationId xmlns:a16="http://schemas.microsoft.com/office/drawing/2014/main" id="{820995EC-8CB3-403D-845B-DF21E7024A62}"/>
+              </a:ext>
+            </a:extLst>
+          </p:cNvPr>
+          <p:cNvSpPr/>
+          <p:nvPr/>
+        </p:nvSpPr>
+        <p:spPr>
+          <a:xfrm>
+            <a:off x="197723" y="147038"/>
+            <a:ext cx="985971" cy="10825762"/>
+          </a:xfrm>
+          <a:prstGeom prst="roundRect">
+            <a:avLst/>
+          </a:prstGeom>
+          <a:gradFill>
+            <a:gsLst>
+              <a:gs pos="0">
+                <a:srgbClr val="7B00AD"/>
+              </a:gs>
+              <a:gs pos="100000">
+                <a:srgbClr val="FDA9A9"/>
+              </a:gs>
+              <a:gs pos="100000">
+                <a:schemeClr val="bg1"/>
+              </a:gs>
+              <a:gs pos="100000">
+                <a:srgbClr val="FDA9A9"/>
+              </a:gs>
+            </a:gsLst>
+            <a:lin ang="5400000" scaled="1"/>
+          </a:gradFill>
+          <a:ln>
+            <a:noFill/>
+          </a:ln>
+          <a:effectLst>
+            <a:outerShdw blurRad="190500" dist="190500" dir="2700000" algn="tl" rotWithShape="0">
+              <a:schemeClr val="bg1">
+                <a:lumMod val="65000"/>
+                <a:alpha val="40000"/>
+              </a:schemeClr>
+            </a:outerShdw>
+          </a:effectLst>
+        </p:spPr>
+        <p:style>
+          <a:lnRef idx="2">
+            <a:schemeClr val="accent1">
+              <a:shade val="50000"/>
+            </a:schemeClr>
+          </a:lnRef>
+          <a:fillRef idx="1">
+            <a:schemeClr val="accent1"/>
+          </a:fillRef>
+          <a:effectRef idx="0">
+            <a:schemeClr val="accent1"/>
+          </a:effectRef>
+          <a:fontRef idx="minor">
+            <a:schemeClr val="lt1"/>
+          </a:fontRef>
+        </p:style>
+        <p:txBody>
+          <a:bodyPr rtlCol="1" anchor="ctr"/>
+          <a:lstStyle/>
+          <a:p>
+            <a:pPr algn="ctr"/>
+            <a:endParaRPr lang="ar-EG" sz="312" dirty="0"/>
+          </a:p>
+        </p:txBody>
+      </p:sp>
+      <p:grpSp>
+        <p:nvGrpSpPr>
+          <p:cNvPr id="22" name="Group 21">
+            <a:extLst>
+              <a:ext uri="{FF2B5EF4-FFF2-40B4-BE49-F238E27FC236}">
+                <a16:creationId xmlns:a16="http://schemas.microsoft.com/office/drawing/2014/main" id="{E0B736EA-3B1D-47CE-93C1-4600D1F64C77}"/>
+              </a:ext>
+            </a:extLst>
+          </p:cNvPr>
+          <p:cNvGrpSpPr/>
+          <p:nvPr/>
+        </p:nvGrpSpPr>
+        <p:grpSpPr>
+          <a:xfrm>
+            <a:off x="7670061" y="496227"/>
+            <a:ext cx="5673733" cy="3850165"/>
+            <a:chOff x="6095999" y="3962399"/>
+            <a:chExt cx="4572000" cy="3200400"/>
+          </a:xfrm>
+        </p:grpSpPr>
+        <p:sp>
+          <p:nvSpPr>
+            <p:cNvPr id="25" name="Rectangle: Rounded Corners 24">
+              <a:extLst>
+                <a:ext uri="{FF2B5EF4-FFF2-40B4-BE49-F238E27FC236}">
+                  <a16:creationId xmlns:a16="http://schemas.microsoft.com/office/drawing/2014/main" id="{1F51D0CC-8549-42BC-A5C0-68F38963F8C5}"/>
+                </a:ext>
+              </a:extLst>
+            </p:cNvPr>
+            <p:cNvSpPr/>
+            <p:nvPr/>
+          </p:nvSpPr>
+          <p:spPr>
+            <a:xfrm>
+              <a:off x="6095999" y="3962399"/>
+              <a:ext cx="4572000" cy="3200400"/>
+            </a:xfrm>
+            <a:prstGeom prst="roundRect">
+              <a:avLst/>
+            </a:prstGeom>
+            <a:solidFill>
+              <a:schemeClr val="bg1">
+                <a:lumMod val="85000"/>
+              </a:schemeClr>
+            </a:solidFill>
+            <a:ln>
+              <a:noFill/>
+            </a:ln>
+            <a:effectLst>
+              <a:outerShdw blurRad="127000" dist="127000" dir="13500000" algn="br" rotWithShape="0">
+                <a:schemeClr val="bg1">
+                  <a:alpha val="40000"/>
+                </a:schemeClr>
+              </a:outerShdw>
+            </a:effectLst>
+          </p:spPr>
+          <p:style>
+            <a:lnRef idx="2">
+              <a:schemeClr val="accent1">
+                <a:shade val="50000"/>
+              </a:schemeClr>
+            </a:lnRef>
+            <a:fillRef idx="1">
+              <a:schemeClr val="accent1"/>
+            </a:fillRef>
+            <a:effectRef idx="0">
+              <a:schemeClr val="accent1"/>
+            </a:effectRef>
+            <a:fontRef idx="minor">
+              <a:schemeClr val="lt1"/>
+            </a:fontRef>
+          </p:style>
+          <p:txBody>
+            <a:bodyPr rtlCol="1" anchor="ctr"/>
+            <a:lstStyle/>
+            <a:p>
+              <a:pPr algn="ctr"/>
+              <a:r>
+                <a:rPr lang="en-US" sz="312" dirty="0"/>
+                <a:t> </a:t>
+              </a:r>
+              <a:endParaRPr lang="ar-EG" sz="312" dirty="0"/>
+            </a:p>
+          </p:txBody>
+        </p:sp>
+        <p:sp>
+          <p:nvSpPr>
+            <p:cNvPr id="26" name="Rectangle: Rounded Corners 25">
+              <a:extLst>
+                <a:ext uri="{FF2B5EF4-FFF2-40B4-BE49-F238E27FC236}">
+                  <a16:creationId xmlns:a16="http://schemas.microsoft.com/office/drawing/2014/main" id="{0613FAF8-D670-4B74-9FB1-F76C4C171B96}"/>
+                </a:ext>
+              </a:extLst>
+            </p:cNvPr>
+            <p:cNvSpPr/>
+            <p:nvPr/>
+          </p:nvSpPr>
+          <p:spPr>
+            <a:xfrm>
+              <a:off x="6095999" y="3962399"/>
+              <a:ext cx="4572000" cy="3200400"/>
+            </a:xfrm>
+            <a:prstGeom prst="roundRect">
+              <a:avLst/>
+            </a:prstGeom>
+            <a:gradFill>
+              <a:gsLst>
+                <a:gs pos="0">
+                  <a:srgbClr val="EDEEF5"/>
+                </a:gs>
+                <a:gs pos="100000">
+                  <a:schemeClr val="bg1"/>
+                </a:gs>
+                <a:gs pos="100000">
+                  <a:schemeClr val="accent1">
+                    <a:lumMod val="45000"/>
+                    <a:lumOff val="55000"/>
+                  </a:schemeClr>
+                </a:gs>
+              </a:gsLst>
+              <a:lin ang="5400000" scaled="1"/>
+            </a:gradFill>
+            <a:ln>
+              <a:noFill/>
+            </a:ln>
+            <a:effectLst>
+              <a:outerShdw blurRad="190500" dist="190500" dir="2700000" algn="tl" rotWithShape="0">
+                <a:schemeClr val="bg1">
+                  <a:lumMod val="65000"/>
+                  <a:alpha val="40000"/>
+                </a:schemeClr>
+              </a:outerShdw>
+            </a:effectLst>
+          </p:spPr>
+          <p:style>
+            <a:lnRef idx="2">
+              <a:schemeClr val="accent1">
+                <a:shade val="50000"/>
+              </a:schemeClr>
+            </a:lnRef>
+            <a:fillRef idx="1">
+              <a:schemeClr val="accent1"/>
+            </a:fillRef>
+            <a:effectRef idx="0">
+              <a:schemeClr val="accent1"/>
+            </a:effectRef>
+            <a:fontRef idx="minor">
+              <a:schemeClr val="lt1"/>
+            </a:fontRef>
+          </p:style>
+          <p:txBody>
+            <a:bodyPr rtlCol="1" anchor="ctr"/>
+            <a:lstStyle/>
+            <a:p>
+              <a:pPr algn="ctr"/>
+              <a:endParaRPr lang="ar-EG" sz="312" dirty="0"/>
+            </a:p>
+          </p:txBody>
+        </p:sp>
+      </p:grpSp>
+      <p:grpSp>
+        <p:nvGrpSpPr>
+          <p:cNvPr id="27" name="Group 26">
+            <a:extLst>
+              <a:ext uri="{FF2B5EF4-FFF2-40B4-BE49-F238E27FC236}">
+                <a16:creationId xmlns:a16="http://schemas.microsoft.com/office/drawing/2014/main" id="{020B7D52-D71B-4828-A3DE-C35BAABB8662}"/>
+              </a:ext>
+            </a:extLst>
+          </p:cNvPr>
+          <p:cNvGrpSpPr/>
+          <p:nvPr/>
+        </p:nvGrpSpPr>
+        <p:grpSpPr>
+          <a:xfrm>
+            <a:off x="13913676" y="513345"/>
+            <a:ext cx="5673733" cy="3850165"/>
+            <a:chOff x="6095999" y="3962399"/>
+            <a:chExt cx="4572000" cy="3200400"/>
+          </a:xfrm>
+        </p:grpSpPr>
+        <p:sp>
+          <p:nvSpPr>
+            <p:cNvPr id="28" name="Rectangle: Rounded Corners 27">
+              <a:extLst>
+                <a:ext uri="{FF2B5EF4-FFF2-40B4-BE49-F238E27FC236}">
+                  <a16:creationId xmlns:a16="http://schemas.microsoft.com/office/drawing/2014/main" id="{5AEDADD6-2BC5-41C4-87D1-6B0B43D2E26D}"/>
+                </a:ext>
+              </a:extLst>
+            </p:cNvPr>
+            <p:cNvSpPr/>
+            <p:nvPr/>
+          </p:nvSpPr>
+          <p:spPr>
+            <a:xfrm>
+              <a:off x="6095999" y="3962399"/>
+              <a:ext cx="4572000" cy="3200400"/>
+            </a:xfrm>
+            <a:prstGeom prst="roundRect">
+              <a:avLst/>
+            </a:prstGeom>
+            <a:solidFill>
+              <a:schemeClr val="bg1">
+                <a:lumMod val="85000"/>
+              </a:schemeClr>
+            </a:solidFill>
+            <a:ln>
+              <a:noFill/>
+            </a:ln>
+            <a:effectLst>
+              <a:outerShdw blurRad="127000" dist="127000" dir="13500000" algn="br" rotWithShape="0">
+                <a:schemeClr val="bg1">
+                  <a:alpha val="40000"/>
+                </a:schemeClr>
+              </a:outerShdw>
+            </a:effectLst>
+          </p:spPr>
+          <p:style>
+            <a:lnRef idx="2">
+              <a:schemeClr val="accent1">
+                <a:shade val="50000"/>
+              </a:schemeClr>
+            </a:lnRef>
+            <a:fillRef idx="1">
+              <a:schemeClr val="accent1"/>
+            </a:fillRef>
+            <a:effectRef idx="0">
+              <a:schemeClr val="accent1"/>
+            </a:effectRef>
+            <a:fontRef idx="minor">
+              <a:schemeClr val="lt1"/>
+            </a:fontRef>
+          </p:style>
+          <p:txBody>
+            <a:bodyPr rtlCol="1" anchor="ctr"/>
+            <a:lstStyle/>
+            <a:p>
+              <a:pPr algn="ctr"/>
+              <a:r>
+                <a:rPr lang="en-US" sz="312" dirty="0"/>
+                <a:t> </a:t>
+              </a:r>
+              <a:endParaRPr lang="ar-EG" sz="312" dirty="0"/>
+            </a:p>
+          </p:txBody>
+        </p:sp>
+        <p:sp>
+          <p:nvSpPr>
+            <p:cNvPr id="29" name="Rectangle: Rounded Corners 28">
+              <a:extLst>
+                <a:ext uri="{FF2B5EF4-FFF2-40B4-BE49-F238E27FC236}">
+                  <a16:creationId xmlns:a16="http://schemas.microsoft.com/office/drawing/2014/main" id="{F9DD1971-C102-42F6-B0A3-5337E5FA1D49}"/>
+                </a:ext>
+              </a:extLst>
+            </p:cNvPr>
+            <p:cNvSpPr/>
+            <p:nvPr/>
+          </p:nvSpPr>
+          <p:spPr>
+            <a:xfrm>
+              <a:off x="6095999" y="3962399"/>
+              <a:ext cx="4572000" cy="3200400"/>
+            </a:xfrm>
+            <a:prstGeom prst="roundRect">
+              <a:avLst/>
+            </a:prstGeom>
+            <a:gradFill>
+              <a:gsLst>
+                <a:gs pos="0">
+                  <a:srgbClr val="EDEEF5"/>
+                </a:gs>
+                <a:gs pos="100000">
+                  <a:schemeClr val="bg1"/>
+                </a:gs>
+                <a:gs pos="100000">
+                  <a:schemeClr val="accent1">
+                    <a:lumMod val="45000"/>
+                    <a:lumOff val="55000"/>
+                  </a:schemeClr>
+                </a:gs>
+              </a:gsLst>
+              <a:lin ang="5400000" scaled="1"/>
+            </a:gradFill>
+            <a:ln>
+              <a:noFill/>
+            </a:ln>
+            <a:effectLst>
+              <a:outerShdw blurRad="190500" dist="190500" dir="2700000" algn="tl" rotWithShape="0">
+                <a:schemeClr val="bg1">
+                  <a:lumMod val="65000"/>
+                  <a:alpha val="40000"/>
+                </a:schemeClr>
+              </a:outerShdw>
+            </a:effectLst>
+          </p:spPr>
+          <p:style>
+            <a:lnRef idx="2">
+              <a:schemeClr val="accent1">
+                <a:shade val="50000"/>
+              </a:schemeClr>
+            </a:lnRef>
+            <a:fillRef idx="1">
+              <a:schemeClr val="accent1"/>
+            </a:fillRef>
+            <a:effectRef idx="0">
+              <a:schemeClr val="accent1"/>
+            </a:effectRef>
+            <a:fontRef idx="minor">
+              <a:schemeClr val="lt1"/>
+            </a:fontRef>
+          </p:style>
+          <p:txBody>
+            <a:bodyPr rtlCol="1" anchor="ctr"/>
+            <a:lstStyle/>
+            <a:p>
+              <a:pPr algn="ctr"/>
+              <a:endParaRPr lang="ar-EG" sz="312" dirty="0"/>
+            </a:p>
+          </p:txBody>
+        </p:sp>
+      </p:grpSp>
+    </p:spTree>
+    <p:extLst>
+      <p:ext uri="{BB962C8B-B14F-4D97-AF65-F5344CB8AC3E}">
+        <p14:creationId xmlns:p14="http://schemas.microsoft.com/office/powerpoint/2010/main" val="3979482732"/>
+      </p:ext>
+    </p:extLst>
+  </p:cSld>
+  <p:clrMapOvr>
+    <a:masterClrMapping/>
+  </p:clrMapOvr>
+</p:sld>
+</file>
+
 <file path=ppt/theme/theme1.xml><?xml version="1.0" encoding="utf-8"?>
 <a:theme xmlns:a="http://schemas.openxmlformats.org/drawingml/2006/main" name="Office Theme">
   <a:themeElements>
-    <a:clrScheme name="Orange Red">
+    <a:clrScheme name="Office Theme">
       <a:dk1>
         <a:sysClr val="windowText" lastClr="000000"/>
       </a:dk1>
@@ -4159,37 +4584,37 @@
         <a:sysClr val="window" lastClr="FFFFFF"/>
       </a:lt1>
       <a:dk2>
-        <a:srgbClr val="696464"/>
+        <a:srgbClr val="44546A"/>
       </a:dk2>
       <a:lt2>
-        <a:srgbClr val="E9E5DC"/>
+        <a:srgbClr val="E7E6E6"/>
       </a:lt2>
       <a:accent1>
-        <a:srgbClr val="D34817"/>
+        <a:srgbClr val="4472C4"/>
       </a:accent1>
       <a:accent2>
-        <a:srgbClr val="9B2D1F"/>
+        <a:srgbClr val="ED7D31"/>
       </a:accent2>
       <a:accent3>
-        <a:srgbClr val="A28E6A"/>
+        <a:srgbClr val="A5A5A5"/>
       </a:accent3>
       <a:accent4>
-        <a:srgbClr val="956251"/>
+        <a:srgbClr val="FFC000"/>
       </a:accent4>
       <a:accent5>
-        <a:srgbClr val="918485"/>
+        <a:srgbClr val="5B9BD5"/>
       </a:accent5>
       <a:accent6>
-        <a:srgbClr val="855D5D"/>
+        <a:srgbClr val="70AD47"/>
       </a:accent6>
       <a:hlink>
-        <a:srgbClr val="CC9900"/>
+        <a:srgbClr val="0563C1"/>
       </a:hlink>
       <a:folHlink>
-        <a:srgbClr val="96A9A9"/>
+        <a:srgbClr val="954F72"/>
       </a:folHlink>
     </a:clrScheme>
-    <a:fontScheme name="Office">
+    <a:fontScheme name="Office Theme">
       <a:majorFont>
         <a:latin typeface="Calibri Light" panose="020F0302020204030204"/>
         <a:ea typeface=""/>
@@ -4224,23 +4649,6 @@
         <a:font script="Viet" typeface="Times New Roman"/>
         <a:font script="Uigh" typeface="Microsoft Uighur"/>
         <a:font script="Geor" typeface="Sylfaen"/>
-        <a:font script="Armn" typeface="Arial"/>
-        <a:font script="Bugi" typeface="Leelawadee UI"/>
-        <a:font script="Bopo" typeface="Microsoft JhengHei"/>
-        <a:font script="Java" typeface="Javanese Text"/>
-        <a:font script="Lisu" typeface="Segoe UI"/>
-        <a:font script="Mymr" typeface="Myanmar Text"/>
-        <a:font script="Nkoo" typeface="Ebrima"/>
-        <a:font script="Olck" typeface="Nirmala UI"/>
-        <a:font script="Osma" typeface="Ebrima"/>
-        <a:font script="Phag" typeface="Phagspa"/>
-        <a:font script="Syrn" typeface="Estrangelo Edessa"/>
-        <a:font script="Syrj" typeface="Estrangelo Edessa"/>
-        <a:font script="Syre" typeface="Estrangelo Edessa"/>
-        <a:font script="Sora" typeface="Nirmala UI"/>
-        <a:font script="Tale" typeface="Microsoft Tai Le"/>
-        <a:font script="Talu" typeface="Microsoft New Tai Lue"/>
-        <a:font script="Tfng" typeface="Ebrima"/>
       </a:majorFont>
       <a:minorFont>
         <a:latin typeface="Calibri" panose="020F0502020204030204"/>
@@ -4276,26 +4684,9 @@
         <a:font script="Viet" typeface="Arial"/>
         <a:font script="Uigh" typeface="Microsoft Uighur"/>
         <a:font script="Geor" typeface="Sylfaen"/>
-        <a:font script="Armn" typeface="Arial"/>
-        <a:font script="Bugi" typeface="Leelawadee UI"/>
-        <a:font script="Bopo" typeface="Microsoft JhengHei"/>
-        <a:font script="Java" typeface="Javanese Text"/>
-        <a:font script="Lisu" typeface="Segoe UI"/>
-        <a:font script="Mymr" typeface="Myanmar Text"/>
-        <a:font script="Nkoo" typeface="Ebrima"/>
-        <a:font script="Olck" typeface="Nirmala UI"/>
-        <a:font script="Osma" typeface="Ebrima"/>
-        <a:font script="Phag" typeface="Phagspa"/>
-        <a:font script="Syrn" typeface="Estrangelo Edessa"/>
-        <a:font script="Syrj" typeface="Estrangelo Edessa"/>
-        <a:font script="Syre" typeface="Estrangelo Edessa"/>
-        <a:font script="Sora" typeface="Nirmala UI"/>
-        <a:font script="Tale" typeface="Microsoft Tai Le"/>
-        <a:font script="Talu" typeface="Microsoft New Tai Lue"/>
-        <a:font script="Tfng" typeface="Ebrima"/>
       </a:minorFont>
     </a:fontScheme>
-    <a:fmtScheme name="Office">
+    <a:fmtScheme name="Office Theme">
       <a:fillStyleLst>
         <a:solidFill>
           <a:schemeClr val="phClr"/>
